--- a/Multi Lot Parking System (1).pptx
+++ b/Multi Lot Parking System (1).pptx
@@ -1,129 +1,150 @@
 
 <file path=ppt/presentation.xml><?xml version="1.0" encoding="utf-8"?>
-<ns0:presentation xmlns:ns0="http://schemas.openxmlformats.org/presentationml/2006/main" xmlns:ns1="http://schemas.openxmlformats.org/officeDocument/2006/relationships" xmlns:ns2="http://schemas.openxmlformats.org/drawingml/2006/main" saveSubsetFonts="1" autoCompressPictures="0" embedTrueTypeFonts="1">
-  <ns0:sldMasterIdLst>
-    <ns0:sldMasterId id="2147483648" ns1:id="rId1"/>
-  </ns0:sldMasterIdLst>
-  <ns0:sldIdLst>
-    <ns0:sldId id="256" ns1:id="rId7"/>
-    <ns0:sldId id="257" ns1:id="rId8"/>
-    <ns0:sldId id="258" ns1:id="rId9"/>
-    <ns0:sldId id="259" ns1:id="rId10"/>
-    <ns0:sldId id="260" ns1:id="rId11"/>
-    <ns0:sldId id="261" ns1:id="rId12"/>
-    <ns0:sldId id="262" ns1:id="rId13"/>
-    <ns0:sldId id="263" ns1:id="rId14"/>
-  </ns0:sldIdLst>
-  <ns0:sldSz cx="12192000" cy="6858000" type="screen4x3"/>
-  <ns0:notesSz cx="6858000" cy="9144000"/>
-  <ns0:embeddedFontLst>
-    <ns0:embeddedFont>
-      <ns0:font typeface="Plus Jakarta Sans"/>
-      <ns0:bold ns1:id="rIdFont15"/>
-      <ns0:regular ns1:id="rIdFont16"/>
-    </ns0:embeddedFont>
-    <ns0:embeddedFont>
-      <ns0:font typeface="JetBrains Mono"/>
-      <ns0:bold ns1:id="rIdFont17"/>
-      <ns0:regular ns1:id="rIdFont18"/>
-    </ns0:embeddedFont>
-  </ns0:embeddedFontLst>
-  <ns0:defaultTextStyle>
-    <ns2:defPPr>
-      <ns2:defRPr lang="en-US"/>
-    </ns2:defPPr>
-    <ns2:lvl1pPr marL="0" algn="l" defTabSz="457200" rtl="0" eaLnBrk="1" latinLnBrk="0" hangingPunct="1">
-      <ns2:defRPr sz="1800" kern="1200">
-        <ns2:solidFill>
-          <ns2:schemeClr val="tx1"/>
-        </ns2:solidFill>
-        <ns2:latin typeface="+mn-lt"/>
-        <ns2:ea typeface="+mn-ea"/>
-        <ns2:cs typeface="+mn-cs"/>
-      </ns2:defRPr>
-    </ns2:lvl1pPr>
-    <ns2:lvl2pPr marL="457200" algn="l" defTabSz="457200" rtl="0" eaLnBrk="1" latinLnBrk="0" hangingPunct="1">
-      <ns2:defRPr sz="1800" kern="1200">
-        <ns2:solidFill>
-          <ns2:schemeClr val="tx1"/>
-        </ns2:solidFill>
-        <ns2:latin typeface="+mn-lt"/>
-        <ns2:ea typeface="+mn-ea"/>
-        <ns2:cs typeface="+mn-cs"/>
-      </ns2:defRPr>
-    </ns2:lvl2pPr>
-    <ns2:lvl3pPr marL="914400" algn="l" defTabSz="457200" rtl="0" eaLnBrk="1" latinLnBrk="0" hangingPunct="1">
-      <ns2:defRPr sz="1800" kern="1200">
-        <ns2:solidFill>
-          <ns2:schemeClr val="tx1"/>
-        </ns2:solidFill>
-        <ns2:latin typeface="+mn-lt"/>
-        <ns2:ea typeface="+mn-ea"/>
-        <ns2:cs typeface="+mn-cs"/>
-      </ns2:defRPr>
-    </ns2:lvl3pPr>
-    <ns2:lvl4pPr marL="1371600" algn="l" defTabSz="457200" rtl="0" eaLnBrk="1" latinLnBrk="0" hangingPunct="1">
-      <ns2:defRPr sz="1800" kern="1200">
-        <ns2:solidFill>
-          <ns2:schemeClr val="tx1"/>
-        </ns2:solidFill>
-        <ns2:latin typeface="+mn-lt"/>
-        <ns2:ea typeface="+mn-ea"/>
-        <ns2:cs typeface="+mn-cs"/>
-      </ns2:defRPr>
-    </ns2:lvl4pPr>
-    <ns2:lvl5pPr marL="1828800" algn="l" defTabSz="457200" rtl="0" eaLnBrk="1" latinLnBrk="0" hangingPunct="1">
-      <ns2:defRPr sz="1800" kern="1200">
-        <ns2:solidFill>
-          <ns2:schemeClr val="tx1"/>
-        </ns2:solidFill>
-        <ns2:latin typeface="+mn-lt"/>
-        <ns2:ea typeface="+mn-ea"/>
-        <ns2:cs typeface="+mn-cs"/>
-      </ns2:defRPr>
-    </ns2:lvl5pPr>
-    <ns2:lvl6pPr marL="2286000" algn="l" defTabSz="457200" rtl="0" eaLnBrk="1" latinLnBrk="0" hangingPunct="1">
-      <ns2:defRPr sz="1800" kern="1200">
-        <ns2:solidFill>
-          <ns2:schemeClr val="tx1"/>
-        </ns2:solidFill>
-        <ns2:latin typeface="+mn-lt"/>
-        <ns2:ea typeface="+mn-ea"/>
-        <ns2:cs typeface="+mn-cs"/>
-      </ns2:defRPr>
-    </ns2:lvl6pPr>
-    <ns2:lvl7pPr marL="2743200" algn="l" defTabSz="457200" rtl="0" eaLnBrk="1" latinLnBrk="0" hangingPunct="1">
-      <ns2:defRPr sz="1800" kern="1200">
-        <ns2:solidFill>
-          <ns2:schemeClr val="tx1"/>
-        </ns2:solidFill>
-        <ns2:latin typeface="+mn-lt"/>
-        <ns2:ea typeface="+mn-ea"/>
-        <ns2:cs typeface="+mn-cs"/>
-      </ns2:defRPr>
-    </ns2:lvl7pPr>
-    <ns2:lvl8pPr marL="3200400" algn="l" defTabSz="457200" rtl="0" eaLnBrk="1" latinLnBrk="0" hangingPunct="1">
-      <ns2:defRPr sz="1800" kern="1200">
-        <ns2:solidFill>
-          <ns2:schemeClr val="tx1"/>
-        </ns2:solidFill>
-        <ns2:latin typeface="+mn-lt"/>
-        <ns2:ea typeface="+mn-ea"/>
-        <ns2:cs typeface="+mn-cs"/>
-      </ns2:defRPr>
-    </ns2:lvl8pPr>
-    <ns2:lvl9pPr marL="3657600" algn="l" defTabSz="457200" rtl="0" eaLnBrk="1" latinLnBrk="0" hangingPunct="1">
-      <ns2:defRPr sz="1800" kern="1200">
-        <ns2:solidFill>
-          <ns2:schemeClr val="tx1"/>
-        </ns2:solidFill>
-        <ns2:latin typeface="+mn-lt"/>
-        <ns2:ea typeface="+mn-ea"/>
-        <ns2:cs typeface="+mn-cs"/>
-      </ns2:defRPr>
-    </ns2:lvl9pPr>
-  </ns0:defaultTextStyle>
-</ns0:presentation>
+<p:presentation xmlns:a="http://schemas.openxmlformats.org/drawingml/2006/main" xmlns:r="http://schemas.openxmlformats.org/officeDocument/2006/relationships" xmlns:p="http://schemas.openxmlformats.org/presentationml/2006/main" embedTrueTypeFonts="1" saveSubsetFonts="1" autoCompressPictures="0">
+  <p:sldMasterIdLst>
+    <p:sldMasterId id="2147483648" r:id="rId1"/>
+  </p:sldMasterIdLst>
+  <p:sldIdLst>
+    <p:sldId id="256" r:id="rId2"/>
+    <p:sldId id="257" r:id="rId3"/>
+    <p:sldId id="258" r:id="rId4"/>
+    <p:sldId id="259" r:id="rId5"/>
+    <p:sldId id="260" r:id="rId6"/>
+    <p:sldId id="261" r:id="rId7"/>
+    <p:sldId id="262" r:id="rId8"/>
+    <p:sldId id="263" r:id="rId9"/>
+  </p:sldIdLst>
+  <p:sldSz cx="12192000" cy="6858000"/>
+  <p:notesSz cx="6858000" cy="9144000"/>
+  <p:embeddedFontLst>
+    <p:embeddedFont>
+      <p:font typeface="JetBrains Mono"/>
+      <p:bold r:id="rId10"/>
+    </p:embeddedFont>
+    <p:embeddedFont>
+      <p:font typeface="Plus Jakarta Sans"/>
+      <p:bold r:id="rId11"/>
+    </p:embeddedFont>
+    <p:embeddedFont>
+      <p:font typeface="Calibri" panose="020F0502020204030204" pitchFamily="34" charset="0"/>
+      <p:regular r:id="rId12"/>
+      <p:bold r:id="rId13"/>
+      <p:italic r:id="rId14"/>
+      <p:boldItalic r:id="rId15"/>
+    </p:embeddedFont>
+  </p:embeddedFontLst>
+  <p:defaultTextStyle>
+    <a:defPPr>
+      <a:defRPr lang="en-US"/>
+    </a:defPPr>
+    <a:lvl1pPr marL="0" algn="l" defTabSz="457200" rtl="0" eaLnBrk="1" latinLnBrk="0" hangingPunct="1">
+      <a:defRPr sz="1800" kern="1200">
+        <a:solidFill>
+          <a:schemeClr val="tx1"/>
+        </a:solidFill>
+        <a:latin typeface="+mn-lt"/>
+        <a:ea typeface="+mn-ea"/>
+        <a:cs typeface="+mn-cs"/>
+      </a:defRPr>
+    </a:lvl1pPr>
+    <a:lvl2pPr marL="457200" algn="l" defTabSz="457200" rtl="0" eaLnBrk="1" latinLnBrk="0" hangingPunct="1">
+      <a:defRPr sz="1800" kern="1200">
+        <a:solidFill>
+          <a:schemeClr val="tx1"/>
+        </a:solidFill>
+        <a:latin typeface="+mn-lt"/>
+        <a:ea typeface="+mn-ea"/>
+        <a:cs typeface="+mn-cs"/>
+      </a:defRPr>
+    </a:lvl2pPr>
+    <a:lvl3pPr marL="914400" algn="l" defTabSz="457200" rtl="0" eaLnBrk="1" latinLnBrk="0" hangingPunct="1">
+      <a:defRPr sz="1800" kern="1200">
+        <a:solidFill>
+          <a:schemeClr val="tx1"/>
+        </a:solidFill>
+        <a:latin typeface="+mn-lt"/>
+        <a:ea typeface="+mn-ea"/>
+        <a:cs typeface="+mn-cs"/>
+      </a:defRPr>
+    </a:lvl3pPr>
+    <a:lvl4pPr marL="1371600" algn="l" defTabSz="457200" rtl="0" eaLnBrk="1" latinLnBrk="0" hangingPunct="1">
+      <a:defRPr sz="1800" kern="1200">
+        <a:solidFill>
+          <a:schemeClr val="tx1"/>
+        </a:solidFill>
+        <a:latin typeface="+mn-lt"/>
+        <a:ea typeface="+mn-ea"/>
+        <a:cs typeface="+mn-cs"/>
+      </a:defRPr>
+    </a:lvl4pPr>
+    <a:lvl5pPr marL="1828800" algn="l" defTabSz="457200" rtl="0" eaLnBrk="1" latinLnBrk="0" hangingPunct="1">
+      <a:defRPr sz="1800" kern="1200">
+        <a:solidFill>
+          <a:schemeClr val="tx1"/>
+        </a:solidFill>
+        <a:latin typeface="+mn-lt"/>
+        <a:ea typeface="+mn-ea"/>
+        <a:cs typeface="+mn-cs"/>
+      </a:defRPr>
+    </a:lvl5pPr>
+    <a:lvl6pPr marL="2286000" algn="l" defTabSz="457200" rtl="0" eaLnBrk="1" latinLnBrk="0" hangingPunct="1">
+      <a:defRPr sz="1800" kern="1200">
+        <a:solidFill>
+          <a:schemeClr val="tx1"/>
+        </a:solidFill>
+        <a:latin typeface="+mn-lt"/>
+        <a:ea typeface="+mn-ea"/>
+        <a:cs typeface="+mn-cs"/>
+      </a:defRPr>
+    </a:lvl6pPr>
+    <a:lvl7pPr marL="2743200" algn="l" defTabSz="457200" rtl="0" eaLnBrk="1" latinLnBrk="0" hangingPunct="1">
+      <a:defRPr sz="1800" kern="1200">
+        <a:solidFill>
+          <a:schemeClr val="tx1"/>
+        </a:solidFill>
+        <a:latin typeface="+mn-lt"/>
+        <a:ea typeface="+mn-ea"/>
+        <a:cs typeface="+mn-cs"/>
+      </a:defRPr>
+    </a:lvl7pPr>
+    <a:lvl8pPr marL="3200400" algn="l" defTabSz="457200" rtl="0" eaLnBrk="1" latinLnBrk="0" hangingPunct="1">
+      <a:defRPr sz="1800" kern="1200">
+        <a:solidFill>
+          <a:schemeClr val="tx1"/>
+        </a:solidFill>
+        <a:latin typeface="+mn-lt"/>
+        <a:ea typeface="+mn-ea"/>
+        <a:cs typeface="+mn-cs"/>
+      </a:defRPr>
+    </a:lvl8pPr>
+    <a:lvl9pPr marL="3657600" algn="l" defTabSz="457200" rtl="0" eaLnBrk="1" latinLnBrk="0" hangingPunct="1">
+      <a:defRPr sz="1800" kern="1200">
+        <a:solidFill>
+          <a:schemeClr val="tx1"/>
+        </a:solidFill>
+        <a:latin typeface="+mn-lt"/>
+        <a:ea typeface="+mn-ea"/>
+        <a:cs typeface="+mn-cs"/>
+      </a:defRPr>
+    </a:lvl9pPr>
+  </p:defaultTextStyle>
+  <p:extLst>
+    <p:ext uri="{EFAFB233-063F-42B5-8137-9DF3F51BA10A}">
+      <p15:sldGuideLst xmlns:p15="http://schemas.microsoft.com/office/powerpoint/2012/main">
+        <p15:guide id="1" orient="horz" pos="2160">
+          <p15:clr>
+            <a:srgbClr val="A4A3A4"/>
+          </p15:clr>
+        </p15:guide>
+        <p15:guide id="2" pos="2880">
+          <p15:clr>
+            <a:srgbClr val="A4A3A4"/>
+          </p15:clr>
+        </p15:guide>
+      </p15:sldGuideLst>
+    </p:ext>
+  </p:extLst>
+</p:presentation>
 </file>
 
 <file path=ppt/slideLayouts/slideLayout1.xml><?xml version="1.0" encoding="utf-8"?>
@@ -307,7 +328,7 @@
           <a:p>
             <a:fld id="{5BCAD085-E8A6-8845-BD4E-CB4CCA059FC4}" type="datetimeFigureOut">
               <a:rPr lang="en-US" smtClean="0"/>
-              <a:t>1/27/13</a:t>
+              <a:t>9/21/2026</a:t>
             </a:fld>
             <a:endParaRPr lang="en-US"/>
           </a:p>
@@ -477,7 +498,7 @@
           <a:p>
             <a:fld id="{5BCAD085-E8A6-8845-BD4E-CB4CCA059FC4}" type="datetimeFigureOut">
               <a:rPr lang="en-US" smtClean="0"/>
-              <a:t>1/27/13</a:t>
+              <a:t>9/21/2026</a:t>
             </a:fld>
             <a:endParaRPr lang="en-US"/>
           </a:p>
@@ -657,7 +678,7 @@
           <a:p>
             <a:fld id="{5BCAD085-E8A6-8845-BD4E-CB4CCA059FC4}" type="datetimeFigureOut">
               <a:rPr lang="en-US" smtClean="0"/>
-              <a:t>1/27/13</a:t>
+              <a:t>9/21/2026</a:t>
             </a:fld>
             <a:endParaRPr lang="en-US"/>
           </a:p>
@@ -827,7 +848,7 @@
           <a:p>
             <a:fld id="{5BCAD085-E8A6-8845-BD4E-CB4CCA059FC4}" type="datetimeFigureOut">
               <a:rPr lang="en-US" smtClean="0"/>
-              <a:t>1/27/13</a:t>
+              <a:t>9/21/2026</a:t>
             </a:fld>
             <a:endParaRPr lang="en-US"/>
           </a:p>
@@ -1073,7 +1094,7 @@
           <a:p>
             <a:fld id="{5BCAD085-E8A6-8845-BD4E-CB4CCA059FC4}" type="datetimeFigureOut">
               <a:rPr lang="en-US" smtClean="0"/>
-              <a:t>1/27/13</a:t>
+              <a:t>9/21/2026</a:t>
             </a:fld>
             <a:endParaRPr lang="en-US"/>
           </a:p>
@@ -1361,7 +1382,7 @@
           <a:p>
             <a:fld id="{5BCAD085-E8A6-8845-BD4E-CB4CCA059FC4}" type="datetimeFigureOut">
               <a:rPr lang="en-US" smtClean="0"/>
-              <a:t>1/27/13</a:t>
+              <a:t>9/21/2026</a:t>
             </a:fld>
             <a:endParaRPr lang="en-US"/>
           </a:p>
@@ -1783,7 +1804,7 @@
           <a:p>
             <a:fld id="{5BCAD085-E8A6-8845-BD4E-CB4CCA059FC4}" type="datetimeFigureOut">
               <a:rPr lang="en-US" smtClean="0"/>
-              <a:t>1/27/13</a:t>
+              <a:t>9/21/2026</a:t>
             </a:fld>
             <a:endParaRPr lang="en-US"/>
           </a:p>
@@ -1901,7 +1922,7 @@
           <a:p>
             <a:fld id="{5BCAD085-E8A6-8845-BD4E-CB4CCA059FC4}" type="datetimeFigureOut">
               <a:rPr lang="en-US" smtClean="0"/>
-              <a:t>1/27/13</a:t>
+              <a:t>9/21/2026</a:t>
             </a:fld>
             <a:endParaRPr lang="en-US"/>
           </a:p>
@@ -1996,7 +2017,7 @@
           <a:p>
             <a:fld id="{5BCAD085-E8A6-8845-BD4E-CB4CCA059FC4}" type="datetimeFigureOut">
               <a:rPr lang="en-US" smtClean="0"/>
-              <a:t>1/27/13</a:t>
+              <a:t>9/21/2026</a:t>
             </a:fld>
             <a:endParaRPr lang="en-US"/>
           </a:p>
@@ -2273,7 +2294,7 @@
           <a:p>
             <a:fld id="{5BCAD085-E8A6-8845-BD4E-CB4CCA059FC4}" type="datetimeFigureOut">
               <a:rPr lang="en-US" smtClean="0"/>
-              <a:t>1/27/13</a:t>
+              <a:t>9/21/2026</a:t>
             </a:fld>
             <a:endParaRPr lang="en-US"/>
           </a:p>
@@ -2526,7 +2547,7 @@
           <a:p>
             <a:fld id="{5BCAD085-E8A6-8845-BD4E-CB4CCA059FC4}" type="datetimeFigureOut">
               <a:rPr lang="en-US" smtClean="0"/>
-              <a:t>1/27/13</a:t>
+              <a:t>9/21/2026</a:t>
             </a:fld>
             <a:endParaRPr lang="en-US"/>
           </a:p>
@@ -2739,7 +2760,7 @@
           <a:p>
             <a:fld id="{5BCAD085-E8A6-8845-BD4E-CB4CCA059FC4}" type="datetimeFigureOut">
               <a:rPr lang="en-US" smtClean="0"/>
-              <a:t>1/27/13</a:t>
+              <a:t>9/21/2026</a:t>
             </a:fld>
             <a:endParaRPr lang="en-US"/>
           </a:p>
@@ -3098,7 +3119,7 @@
 </file>
 
 <file path=ppt/slides/slide1.xml><?xml version="1.0" encoding="utf-8"?>
-<p:sld xmlns:a="http://schemas.openxmlformats.org/drawingml/2006/main" xmlns:p="http://schemas.openxmlformats.org/presentationml/2006/main" xmlns:r="http://schemas.openxmlformats.org/officeDocument/2006/relationships">
+<p:sld xmlns:a="http://schemas.openxmlformats.org/drawingml/2006/main" xmlns:r="http://schemas.openxmlformats.org/officeDocument/2006/relationships" xmlns:p="http://schemas.openxmlformats.org/presentationml/2006/main">
   <p:cSld>
     <p:bg>
       <p:bgPr>
@@ -3114,7 +3135,14 @@
         <p:cNvGrpSpPr/>
         <p:nvPr/>
       </p:nvGrpSpPr>
-      <p:grpSpPr/>
+      <p:grpSpPr>
+        <a:xfrm>
+          <a:off x="0" y="0"/>
+          <a:ext cx="0" cy="0"/>
+          <a:chOff x="0" y="0"/>
+          <a:chExt cx="0" cy="0"/>
+        </a:xfrm>
+      </p:grpSpPr>
       <p:pic>
         <p:nvPicPr>
           <p:cNvPr id="2" name="Picture 1" descr="image.png"/>
@@ -3184,6 +3212,7 @@
           <a:lstStyle/>
           <a:p>
             <a:pPr algn="ctr"/>
+            <a:endParaRPr/>
           </a:p>
         </p:txBody>
       </p:sp>
@@ -3226,6 +3255,7 @@
           <a:lstStyle/>
           <a:p>
             <a:pPr algn="ctr"/>
+            <a:endParaRPr/>
           </a:p>
         </p:txBody>
       </p:sp>
@@ -3270,6 +3300,7 @@
           <a:lstStyle/>
           <a:p>
             <a:pPr algn="ctr"/>
+            <a:endParaRPr/>
           </a:p>
         </p:txBody>
       </p:sp>
@@ -3314,7 +3345,7 @@
           <a:noFill/>
         </p:spPr>
         <p:txBody>
-          <a:bodyPr wrap="none" lIns="0" rIns="0" tIns="0" bIns="0" anchor="t">
+          <a:bodyPr wrap="none" lIns="0" tIns="0" rIns="0" bIns="0" anchor="t">
             <a:spAutoFit/>
           </a:bodyPr>
           <a:lstStyle/>
@@ -3325,7 +3356,7 @@
               </a:lnSpc>
             </a:pPr>
             <a:r>
-              <a:rPr b="1" sz="4200" i="0" u="none">
+              <a:rPr sz="4200" b="1" i="0" u="none">
                 <a:solidFill>
                   <a:srgbClr val="FFFFFF"/>
                 </a:solidFill>
@@ -3353,7 +3384,7 @@
           <a:noFill/>
         </p:spPr>
         <p:txBody>
-          <a:bodyPr wrap="square" lIns="0" rIns="0" tIns="0" bIns="0" anchor="t">
+          <a:bodyPr wrap="square" lIns="0" tIns="0" rIns="0" bIns="0" anchor="t">
             <a:spAutoFit/>
           </a:bodyPr>
           <a:lstStyle/>
@@ -3364,7 +3395,7 @@
               </a:lnSpc>
             </a:pPr>
             <a:r>
-              <a:rPr b="0" sz="1500" i="0" u="none">
+              <a:rPr sz="1500" b="0" i="0" u="none">
                 <a:solidFill>
                   <a:srgbClr val="CBD5E1"/>
                 </a:solidFill>
@@ -3392,14 +3423,14 @@
           <a:noFill/>
         </p:spPr>
         <p:txBody>
-          <a:bodyPr wrap="none" lIns="0" rIns="0" tIns="0" bIns="0" anchor="t">
+          <a:bodyPr wrap="none" lIns="0" tIns="0" rIns="0" bIns="0" anchor="t">
             <a:spAutoFit/>
           </a:bodyPr>
           <a:lstStyle/>
           <a:p>
             <a:pPr algn="l"/>
             <a:r>
-              <a:rPr b="1" sz="975" i="0" u="none">
+              <a:rPr sz="975" b="1" i="0" u="none">
                 <a:solidFill>
                   <a:srgbClr val="818CF8"/>
                 </a:solidFill>
@@ -3427,14 +3458,14 @@
           <a:noFill/>
         </p:spPr>
         <p:txBody>
-          <a:bodyPr wrap="none" lIns="0" rIns="0" tIns="0" bIns="0" anchor="t">
+          <a:bodyPr wrap="none" lIns="0" tIns="0" rIns="0" bIns="0" anchor="t">
             <a:spAutoFit/>
           </a:bodyPr>
           <a:lstStyle/>
           <a:p>
             <a:pPr algn="l"/>
             <a:r>
-              <a:rPr b="1" sz="975" i="0" u="none">
+              <a:rPr sz="975" b="1" i="0" u="none">
                 <a:solidFill>
                   <a:srgbClr val="94A3B8"/>
                 </a:solidFill>
@@ -3462,14 +3493,14 @@
           <a:noFill/>
         </p:spPr>
         <p:txBody>
-          <a:bodyPr wrap="none" lIns="0" rIns="0" tIns="0" bIns="0" anchor="t">
+          <a:bodyPr wrap="none" lIns="0" tIns="0" rIns="0" bIns="0" anchor="t">
             <a:spAutoFit/>
           </a:bodyPr>
           <a:lstStyle/>
           <a:p>
             <a:pPr algn="l"/>
             <a:r>
-              <a:rPr b="1" sz="1200" i="0" u="none">
+              <a:rPr sz="1200" b="1" i="0" u="none">
                 <a:solidFill>
                   <a:srgbClr val="F8FAFC"/>
                 </a:solidFill>
@@ -3497,14 +3528,14 @@
           <a:noFill/>
         </p:spPr>
         <p:txBody>
-          <a:bodyPr wrap="none" lIns="0" rIns="0" tIns="0" bIns="0" anchor="t">
+          <a:bodyPr wrap="none" lIns="0" tIns="0" rIns="0" bIns="0" anchor="t">
             <a:spAutoFit/>
           </a:bodyPr>
           <a:lstStyle/>
           <a:p>
             <a:pPr algn="l"/>
             <a:r>
-              <a:rPr b="0" sz="975" i="0" u="none">
+              <a:rPr sz="975" b="0" i="0" u="none">
                 <a:solidFill>
                   <a:srgbClr val="818CF8"/>
                 </a:solidFill>
@@ -3532,14 +3563,14 @@
           <a:noFill/>
         </p:spPr>
         <p:txBody>
-          <a:bodyPr wrap="none" lIns="0" rIns="0" tIns="0" bIns="0" anchor="t">
+          <a:bodyPr wrap="none" lIns="0" tIns="0" rIns="0" bIns="0" anchor="t">
             <a:spAutoFit/>
           </a:bodyPr>
           <a:lstStyle/>
           <a:p>
             <a:pPr algn="l"/>
             <a:r>
-              <a:rPr b="1" sz="975" i="0" u="none">
+              <a:rPr sz="975" b="1" i="0" u="none">
                 <a:solidFill>
                   <a:srgbClr val="94A3B8"/>
                 </a:solidFill>
@@ -3567,14 +3598,14 @@
           <a:noFill/>
         </p:spPr>
         <p:txBody>
-          <a:bodyPr wrap="none" lIns="0" rIns="0" tIns="0" bIns="0" anchor="t">
+          <a:bodyPr wrap="none" lIns="0" tIns="0" rIns="0" bIns="0" anchor="t">
             <a:spAutoFit/>
           </a:bodyPr>
           <a:lstStyle/>
           <a:p>
             <a:pPr algn="l"/>
             <a:r>
-              <a:rPr b="1" sz="1200" i="0" u="none">
+              <a:rPr sz="1200" b="1" i="0" u="none">
                 <a:solidFill>
                   <a:srgbClr val="F8FAFC"/>
                 </a:solidFill>
@@ -3602,14 +3633,14 @@
           <a:noFill/>
         </p:spPr>
         <p:txBody>
-          <a:bodyPr wrap="none" lIns="0" rIns="0" tIns="0" bIns="0" anchor="t">
+          <a:bodyPr wrap="none" lIns="0" tIns="0" rIns="0" bIns="0" anchor="t">
             <a:spAutoFit/>
           </a:bodyPr>
           <a:lstStyle/>
           <a:p>
             <a:pPr algn="l"/>
             <a:r>
-              <a:rPr b="0" sz="975" i="0" u="none">
+              <a:rPr sz="975" b="0" i="0" u="none">
                 <a:solidFill>
                   <a:srgbClr val="818CF8"/>
                 </a:solidFill>
@@ -3637,14 +3668,14 @@
           <a:noFill/>
         </p:spPr>
         <p:txBody>
-          <a:bodyPr wrap="none" lIns="0" rIns="0" tIns="0" bIns="0" anchor="t">
+          <a:bodyPr wrap="none" lIns="0" tIns="0" rIns="0" bIns="0" anchor="t">
             <a:spAutoFit/>
           </a:bodyPr>
           <a:lstStyle/>
           <a:p>
             <a:pPr algn="l"/>
             <a:r>
-              <a:rPr b="1" sz="975" i="0" u="none">
+              <a:rPr sz="975" b="1" i="0" u="none">
                 <a:solidFill>
                   <a:srgbClr val="94A3B8"/>
                 </a:solidFill>
@@ -3672,14 +3703,14 @@
           <a:noFill/>
         </p:spPr>
         <p:txBody>
-          <a:bodyPr wrap="none" lIns="0" rIns="0" tIns="0" bIns="0" anchor="t">
+          <a:bodyPr wrap="none" lIns="0" tIns="0" rIns="0" bIns="0" anchor="t">
             <a:spAutoFit/>
           </a:bodyPr>
           <a:lstStyle/>
           <a:p>
             <a:pPr algn="l"/>
             <a:r>
-              <a:rPr b="1" sz="1200" i="0" u="none">
+              <a:rPr sz="1200" b="1" i="0" u="none">
                 <a:solidFill>
                   <a:srgbClr val="F8FAFC"/>
                 </a:solidFill>
@@ -3707,14 +3738,14 @@
           <a:noFill/>
         </p:spPr>
         <p:txBody>
-          <a:bodyPr wrap="none" lIns="0" rIns="0" tIns="0" bIns="0" anchor="t">
+          <a:bodyPr wrap="none" lIns="0" tIns="0" rIns="0" bIns="0" anchor="t">
             <a:spAutoFit/>
           </a:bodyPr>
           <a:lstStyle/>
           <a:p>
             <a:pPr algn="l"/>
             <a:r>
-              <a:rPr b="0" sz="975" i="0" u="none">
+              <a:rPr sz="975" b="0" i="0" u="none">
                 <a:solidFill>
                   <a:srgbClr val="818CF8"/>
                 </a:solidFill>
@@ -3734,7 +3765,7 @@
 </file>
 
 <file path=ppt/slides/slide2.xml><?xml version="1.0" encoding="utf-8"?>
-<p:sld xmlns:a="http://schemas.openxmlformats.org/drawingml/2006/main" xmlns:p="http://schemas.openxmlformats.org/presentationml/2006/main" xmlns:r="http://schemas.openxmlformats.org/officeDocument/2006/relationships">
+<p:sld xmlns:a="http://schemas.openxmlformats.org/drawingml/2006/main" xmlns:r="http://schemas.openxmlformats.org/officeDocument/2006/relationships" xmlns:p="http://schemas.openxmlformats.org/presentationml/2006/main">
   <p:cSld>
     <p:bg>
       <p:bgPr>
@@ -3750,7 +3781,14 @@
         <p:cNvGrpSpPr/>
         <p:nvPr/>
       </p:nvGrpSpPr>
-      <p:grpSpPr/>
+      <p:grpSpPr>
+        <a:xfrm>
+          <a:off x="0" y="0"/>
+          <a:ext cx="0" cy="0"/>
+          <a:chOff x="0" y="0"/>
+          <a:chExt cx="0" cy="0"/>
+        </a:xfrm>
+      </p:grpSpPr>
       <p:sp>
         <p:nvSpPr>
           <p:cNvPr id="2" name="Rectangle 1"/>
@@ -3790,6 +3828,7 @@
           <a:lstStyle/>
           <a:p>
             <a:pPr algn="ctr"/>
+            <a:endParaRPr/>
           </a:p>
         </p:txBody>
       </p:sp>
@@ -3836,6 +3875,7 @@
           <a:lstStyle/>
           <a:p>
             <a:pPr algn="ctr"/>
+            <a:endParaRPr/>
           </a:p>
         </p:txBody>
       </p:sp>
@@ -3882,6 +3922,7 @@
           <a:lstStyle/>
           <a:p>
             <a:pPr algn="ctr"/>
+            <a:endParaRPr/>
           </a:p>
         </p:txBody>
       </p:sp>
@@ -3926,6 +3967,7 @@
           <a:lstStyle/>
           <a:p>
             <a:pPr algn="ctr"/>
+            <a:endParaRPr/>
           </a:p>
         </p:txBody>
       </p:sp>
@@ -3970,6 +4012,7 @@
           <a:lstStyle/>
           <a:p>
             <a:pPr algn="ctr"/>
+            <a:endParaRPr/>
           </a:p>
         </p:txBody>
       </p:sp>
@@ -4014,6 +4057,7 @@
           <a:lstStyle/>
           <a:p>
             <a:pPr algn="ctr"/>
+            <a:endParaRPr/>
           </a:p>
         </p:txBody>
       </p:sp>
@@ -4058,6 +4102,7 @@
           <a:lstStyle/>
           <a:p>
             <a:pPr algn="ctr"/>
+            <a:endParaRPr/>
           </a:p>
         </p:txBody>
       </p:sp>
@@ -4102,6 +4147,7 @@
           <a:lstStyle/>
           <a:p>
             <a:pPr algn="ctr"/>
+            <a:endParaRPr/>
           </a:p>
         </p:txBody>
       </p:sp>
@@ -4146,6 +4192,7 @@
           <a:lstStyle/>
           <a:p>
             <a:pPr algn="ctr"/>
+            <a:endParaRPr/>
           </a:p>
         </p:txBody>
       </p:sp>
@@ -4190,6 +4237,7 @@
           <a:lstStyle/>
           <a:p>
             <a:pPr algn="ctr"/>
+            <a:endParaRPr/>
           </a:p>
         </p:txBody>
       </p:sp>
@@ -4234,6 +4282,7 @@
           <a:lstStyle/>
           <a:p>
             <a:pPr algn="ctr"/>
+            <a:endParaRPr/>
           </a:p>
         </p:txBody>
       </p:sp>
@@ -4278,6 +4327,7 @@
           <a:lstStyle/>
           <a:p>
             <a:pPr algn="ctr"/>
+            <a:endParaRPr/>
           </a:p>
         </p:txBody>
       </p:sp>
@@ -4394,14 +4444,14 @@
           <a:noFill/>
         </p:spPr>
         <p:txBody>
-          <a:bodyPr wrap="none" lIns="0" rIns="0" tIns="0" bIns="0" anchor="ctr">
+          <a:bodyPr wrap="none" lIns="0" tIns="0" rIns="0" bIns="0" anchor="ctr">
             <a:spAutoFit/>
           </a:bodyPr>
           <a:lstStyle/>
           <a:p>
             <a:pPr algn="l"/>
             <a:r>
-              <a:rPr b="1" sz="975" i="0" u="none">
+              <a:rPr sz="975" b="1" i="0" u="none">
                 <a:solidFill>
                   <a:srgbClr val="4F46E5"/>
                 </a:solidFill>
@@ -4429,7 +4479,7 @@
           <a:noFill/>
         </p:spPr>
         <p:txBody>
-          <a:bodyPr wrap="none" lIns="0" rIns="0" tIns="0" bIns="0" anchor="t">
+          <a:bodyPr wrap="none" lIns="0" tIns="0" rIns="0" bIns="0" anchor="t">
             <a:spAutoFit/>
           </a:bodyPr>
           <a:lstStyle/>
@@ -4440,7 +4490,7 @@
               </a:lnSpc>
             </a:pPr>
             <a:r>
-              <a:rPr b="1" sz="2850" i="0" u="none">
+              <a:rPr sz="2850" b="1" i="0" u="none">
                 <a:solidFill>
                   <a:srgbClr val="0F172A"/>
                 </a:solidFill>
@@ -4468,14 +4518,14 @@
           <a:noFill/>
         </p:spPr>
         <p:txBody>
-          <a:bodyPr wrap="none" lIns="0" rIns="0" tIns="0" bIns="0" anchor="t">
+          <a:bodyPr wrap="none" lIns="0" tIns="0" rIns="0" bIns="0" anchor="t">
             <a:spAutoFit/>
           </a:bodyPr>
           <a:lstStyle/>
           <a:p>
             <a:pPr algn="l"/>
             <a:r>
-              <a:rPr b="0" sz="900" i="0" u="none">
+              <a:rPr sz="900" b="0" i="0" u="none">
                 <a:solidFill>
                   <a:srgbClr val="0F172A"/>
                 </a:solidFill>
@@ -4503,14 +4553,14 @@
           <a:noFill/>
         </p:spPr>
         <p:txBody>
-          <a:bodyPr wrap="none" lIns="0" rIns="0" tIns="0" bIns="0" anchor="t">
+          <a:bodyPr wrap="none" lIns="0" tIns="0" rIns="0" bIns="0" anchor="t">
             <a:spAutoFit/>
           </a:bodyPr>
           <a:lstStyle/>
           <a:p>
             <a:pPr algn="l"/>
             <a:r>
-              <a:rPr b="0" sz="900" i="0" u="none">
+              <a:rPr sz="900" b="0" i="0" u="none">
                 <a:solidFill>
                   <a:srgbClr val="0F172A"/>
                 </a:solidFill>
@@ -4538,14 +4588,14 @@
           <a:noFill/>
         </p:spPr>
         <p:txBody>
-          <a:bodyPr wrap="none" lIns="0" rIns="0" tIns="0" bIns="0" anchor="t">
+          <a:bodyPr wrap="none" lIns="0" tIns="0" rIns="0" bIns="0" anchor="t">
             <a:spAutoFit/>
           </a:bodyPr>
           <a:lstStyle/>
           <a:p>
             <a:pPr algn="l"/>
             <a:r>
-              <a:rPr b="1" sz="1500" i="0" u="none">
+              <a:rPr sz="1500" b="1" i="0" u="none">
                 <a:solidFill>
                   <a:srgbClr val="0F172A"/>
                 </a:solidFill>
@@ -4573,7 +4623,7 @@
           <a:noFill/>
         </p:spPr>
         <p:txBody>
-          <a:bodyPr wrap="square" lIns="0" rIns="0" tIns="0" bIns="0" anchor="t">
+          <a:bodyPr wrap="square" lIns="0" tIns="0" rIns="0" bIns="0" anchor="t">
             <a:spAutoFit/>
           </a:bodyPr>
           <a:lstStyle/>
@@ -4584,7 +4634,7 @@
               </a:lnSpc>
             </a:pPr>
             <a:r>
-              <a:rPr b="0" sz="1200" i="0" u="none">
+              <a:rPr sz="1200" b="0" i="0" u="none">
                 <a:solidFill>
                   <a:srgbClr val="475569"/>
                 </a:solidFill>
@@ -4612,14 +4662,14 @@
           <a:noFill/>
         </p:spPr>
         <p:txBody>
-          <a:bodyPr wrap="none" lIns="0" rIns="0" tIns="0" bIns="0" anchor="t">
+          <a:bodyPr wrap="none" lIns="0" tIns="0" rIns="0" bIns="0" anchor="t">
             <a:spAutoFit/>
           </a:bodyPr>
           <a:lstStyle/>
           <a:p>
             <a:pPr algn="l"/>
             <a:r>
-              <a:rPr b="1" sz="1500" i="0" u="none">
+              <a:rPr sz="1500" b="1" i="0" u="none">
                 <a:solidFill>
                   <a:srgbClr val="0F172A"/>
                 </a:solidFill>
@@ -4647,7 +4697,7 @@
           <a:noFill/>
         </p:spPr>
         <p:txBody>
-          <a:bodyPr wrap="square" lIns="0" rIns="0" tIns="0" bIns="0" anchor="t">
+          <a:bodyPr wrap="square" lIns="0" tIns="0" rIns="0" bIns="0" anchor="t">
             <a:spAutoFit/>
           </a:bodyPr>
           <a:lstStyle/>
@@ -4658,7 +4708,7 @@
               </a:lnSpc>
             </a:pPr>
             <a:r>
-              <a:rPr b="0" sz="1200" i="0" u="none">
+              <a:rPr sz="1200" b="0" i="0" u="none">
                 <a:solidFill>
                   <a:srgbClr val="475569"/>
                 </a:solidFill>
@@ -4678,7 +4728,7 @@
 </file>
 
 <file path=ppt/slides/slide3.xml><?xml version="1.0" encoding="utf-8"?>
-<p:sld xmlns:a="http://schemas.openxmlformats.org/drawingml/2006/main" xmlns:p="http://schemas.openxmlformats.org/presentationml/2006/main" xmlns:r="http://schemas.openxmlformats.org/officeDocument/2006/relationships">
+<p:sld xmlns:a="http://schemas.openxmlformats.org/drawingml/2006/main" xmlns:r="http://schemas.openxmlformats.org/officeDocument/2006/relationships" xmlns:p="http://schemas.openxmlformats.org/presentationml/2006/main">
   <p:cSld>
     <p:bg>
       <p:bgPr>
@@ -4694,7 +4744,14 @@
         <p:cNvGrpSpPr/>
         <p:nvPr/>
       </p:nvGrpSpPr>
-      <p:grpSpPr/>
+      <p:grpSpPr>
+        <a:xfrm>
+          <a:off x="0" y="0"/>
+          <a:ext cx="0" cy="0"/>
+          <a:chOff x="0" y="0"/>
+          <a:chExt cx="0" cy="0"/>
+        </a:xfrm>
+      </p:grpSpPr>
       <p:sp>
         <p:nvSpPr>
           <p:cNvPr id="2" name="Rectangle 1"/>
@@ -4734,6 +4791,7 @@
           <a:lstStyle/>
           <a:p>
             <a:pPr algn="ctr"/>
+            <a:endParaRPr/>
           </a:p>
         </p:txBody>
       </p:sp>
@@ -4780,6 +4838,7 @@
           <a:lstStyle/>
           <a:p>
             <a:pPr algn="ctr"/>
+            <a:endParaRPr/>
           </a:p>
         </p:txBody>
       </p:sp>
@@ -4826,6 +4885,7 @@
           <a:lstStyle/>
           <a:p>
             <a:pPr algn="ctr"/>
+            <a:endParaRPr/>
           </a:p>
         </p:txBody>
       </p:sp>
@@ -4870,6 +4930,7 @@
           <a:lstStyle/>
           <a:p>
             <a:pPr algn="ctr"/>
+            <a:endParaRPr/>
           </a:p>
         </p:txBody>
       </p:sp>
@@ -4914,6 +4975,7 @@
           <a:lstStyle/>
           <a:p>
             <a:pPr algn="ctr"/>
+            <a:endParaRPr/>
           </a:p>
         </p:txBody>
       </p:sp>
@@ -4958,6 +5020,7 @@
           <a:lstStyle/>
           <a:p>
             <a:pPr algn="ctr"/>
+            <a:endParaRPr/>
           </a:p>
         </p:txBody>
       </p:sp>
@@ -5002,6 +5065,7 @@
           <a:lstStyle/>
           <a:p>
             <a:pPr algn="ctr"/>
+            <a:endParaRPr/>
           </a:p>
         </p:txBody>
       </p:sp>
@@ -5046,6 +5110,7 @@
           <a:lstStyle/>
           <a:p>
             <a:pPr algn="ctr"/>
+            <a:endParaRPr/>
           </a:p>
         </p:txBody>
       </p:sp>
@@ -5090,6 +5155,7 @@
           <a:lstStyle/>
           <a:p>
             <a:pPr algn="ctr"/>
+            <a:endParaRPr/>
           </a:p>
         </p:txBody>
       </p:sp>
@@ -5134,6 +5200,7 @@
           <a:lstStyle/>
           <a:p>
             <a:pPr algn="ctr"/>
+            <a:endParaRPr/>
           </a:p>
         </p:txBody>
       </p:sp>
@@ -5178,6 +5245,7 @@
           <a:lstStyle/>
           <a:p>
             <a:pPr algn="ctr"/>
+            <a:endParaRPr/>
           </a:p>
         </p:txBody>
       </p:sp>
@@ -5222,6 +5290,7 @@
           <a:lstStyle/>
           <a:p>
             <a:pPr algn="ctr"/>
+            <a:endParaRPr/>
           </a:p>
         </p:txBody>
       </p:sp>
@@ -5338,14 +5407,14 @@
           <a:noFill/>
         </p:spPr>
         <p:txBody>
-          <a:bodyPr wrap="none" lIns="0" rIns="0" tIns="0" bIns="0" anchor="ctr">
+          <a:bodyPr wrap="none" lIns="0" tIns="0" rIns="0" bIns="0" anchor="ctr">
             <a:spAutoFit/>
           </a:bodyPr>
           <a:lstStyle/>
           <a:p>
             <a:pPr algn="l"/>
             <a:r>
-              <a:rPr b="1" sz="975" i="0" u="none">
+              <a:rPr sz="975" b="1" i="0" u="none">
                 <a:solidFill>
                   <a:srgbClr val="4F46E5"/>
                 </a:solidFill>
@@ -5373,7 +5442,7 @@
           <a:noFill/>
         </p:spPr>
         <p:txBody>
-          <a:bodyPr wrap="none" lIns="0" rIns="0" tIns="0" bIns="0" anchor="t">
+          <a:bodyPr wrap="none" lIns="0" tIns="0" rIns="0" bIns="0" anchor="t">
             <a:spAutoFit/>
           </a:bodyPr>
           <a:lstStyle/>
@@ -5384,7 +5453,7 @@
               </a:lnSpc>
             </a:pPr>
             <a:r>
-              <a:rPr b="1" sz="2850" i="0" u="none">
+              <a:rPr sz="2850" b="1" i="0" u="none">
                 <a:solidFill>
                   <a:srgbClr val="0F172A"/>
                 </a:solidFill>
@@ -5412,14 +5481,14 @@
           <a:noFill/>
         </p:spPr>
         <p:txBody>
-          <a:bodyPr wrap="none" lIns="0" rIns="0" tIns="0" bIns="0" anchor="t">
+          <a:bodyPr wrap="none" lIns="0" tIns="0" rIns="0" bIns="0" anchor="t">
             <a:spAutoFit/>
           </a:bodyPr>
           <a:lstStyle/>
           <a:p>
             <a:pPr algn="l"/>
             <a:r>
-              <a:rPr b="0" sz="900" i="0" u="none">
+              <a:rPr sz="900" b="0" i="0" u="none">
                 <a:solidFill>
                   <a:srgbClr val="0F172A"/>
                 </a:solidFill>
@@ -5447,14 +5516,14 @@
           <a:noFill/>
         </p:spPr>
         <p:txBody>
-          <a:bodyPr wrap="none" lIns="0" rIns="0" tIns="0" bIns="0" anchor="t">
+          <a:bodyPr wrap="none" lIns="0" tIns="0" rIns="0" bIns="0" anchor="t">
             <a:spAutoFit/>
           </a:bodyPr>
           <a:lstStyle/>
           <a:p>
             <a:pPr algn="l"/>
             <a:r>
-              <a:rPr b="0" sz="900" i="0" u="none">
+              <a:rPr sz="900" b="0" i="0" u="none">
                 <a:solidFill>
                   <a:srgbClr val="0F172A"/>
                 </a:solidFill>
@@ -5482,14 +5551,14 @@
           <a:noFill/>
         </p:spPr>
         <p:txBody>
-          <a:bodyPr wrap="none" lIns="0" rIns="0" tIns="0" bIns="0" anchor="t">
+          <a:bodyPr wrap="none" lIns="0" tIns="0" rIns="0" bIns="0" anchor="t">
             <a:spAutoFit/>
           </a:bodyPr>
           <a:lstStyle/>
           <a:p>
             <a:pPr algn="l"/>
             <a:r>
-              <a:rPr b="1" sz="1500" i="0" u="none">
+              <a:rPr sz="1500" b="1" i="0" u="none">
                 <a:solidFill>
                   <a:srgbClr val="0F172A"/>
                 </a:solidFill>
@@ -5517,7 +5586,7 @@
           <a:noFill/>
         </p:spPr>
         <p:txBody>
-          <a:bodyPr wrap="square" lIns="0" rIns="0" tIns="0" bIns="0" anchor="t">
+          <a:bodyPr wrap="square" lIns="0" tIns="0" rIns="0" bIns="0" anchor="t">
             <a:spAutoFit/>
           </a:bodyPr>
           <a:lstStyle/>
@@ -5528,7 +5597,7 @@
               </a:lnSpc>
             </a:pPr>
             <a:r>
-              <a:rPr b="0" sz="1200" i="0" u="none">
+              <a:rPr sz="1200" b="0" i="0" u="none">
                 <a:solidFill>
                   <a:srgbClr val="475569"/>
                 </a:solidFill>
@@ -5556,14 +5625,14 @@
           <a:noFill/>
         </p:spPr>
         <p:txBody>
-          <a:bodyPr wrap="none" lIns="0" rIns="0" tIns="0" bIns="0" anchor="t">
+          <a:bodyPr wrap="none" lIns="0" tIns="0" rIns="0" bIns="0" anchor="t">
             <a:spAutoFit/>
           </a:bodyPr>
           <a:lstStyle/>
           <a:p>
             <a:pPr algn="l"/>
             <a:r>
-              <a:rPr b="1" sz="1500" i="0" u="none">
+              <a:rPr sz="1500" b="1" i="0" u="none">
                 <a:solidFill>
                   <a:srgbClr val="0F172A"/>
                 </a:solidFill>
@@ -5591,14 +5660,14 @@
           <a:noFill/>
         </p:spPr>
         <p:txBody>
-          <a:bodyPr wrap="none" lIns="0" rIns="0" tIns="0" bIns="0" anchor="t">
+          <a:bodyPr wrap="none" lIns="0" tIns="0" rIns="0" bIns="0" anchor="t">
             <a:spAutoFit/>
           </a:bodyPr>
           <a:lstStyle/>
           <a:p>
             <a:pPr algn="l"/>
             <a:r>
-              <a:rPr b="0" sz="1125" i="0" u="none">
+              <a:rPr sz="1125" b="0" i="0" u="none">
                 <a:solidFill>
                   <a:srgbClr val="475569"/>
                 </a:solidFill>
@@ -5626,7 +5695,7 @@
           <a:noFill/>
         </p:spPr>
         <p:txBody>
-          <a:bodyPr wrap="none" lIns="76200" rIns="0" tIns="0" bIns="0" anchor="t">
+          <a:bodyPr wrap="none" lIns="76200" tIns="0" rIns="0" bIns="0" anchor="t">
             <a:spAutoFit/>
           </a:bodyPr>
           <a:lstStyle/>
@@ -5637,7 +5706,7 @@
               </a:lnSpc>
             </a:pPr>
             <a:r>
-              <a:rPr b="0" sz="1125" i="0" u="none">
+              <a:rPr sz="1125" b="0" i="0" u="none">
                 <a:solidFill>
                   <a:srgbClr val="475569"/>
                 </a:solidFill>
@@ -5665,14 +5734,14 @@
           <a:noFill/>
         </p:spPr>
         <p:txBody>
-          <a:bodyPr wrap="none" lIns="0" rIns="0" tIns="0" bIns="0" anchor="t">
+          <a:bodyPr wrap="none" lIns="0" tIns="0" rIns="0" bIns="0" anchor="t">
             <a:spAutoFit/>
           </a:bodyPr>
           <a:lstStyle/>
           <a:p>
             <a:pPr algn="l"/>
             <a:r>
-              <a:rPr b="0" sz="1125" i="0" u="none">
+              <a:rPr sz="1125" b="0" i="0" u="none">
                 <a:solidFill>
                   <a:srgbClr val="475569"/>
                 </a:solidFill>
@@ -5700,7 +5769,7 @@
           <a:noFill/>
         </p:spPr>
         <p:txBody>
-          <a:bodyPr wrap="none" lIns="76200" rIns="0" tIns="0" bIns="0" anchor="t">
+          <a:bodyPr wrap="none" lIns="76200" tIns="0" rIns="0" bIns="0" anchor="t">
             <a:spAutoFit/>
           </a:bodyPr>
           <a:lstStyle/>
@@ -5711,7 +5780,7 @@
               </a:lnSpc>
             </a:pPr>
             <a:r>
-              <a:rPr b="0" sz="1125" i="0" u="none">
+              <a:rPr sz="1125" b="0" i="0" u="none">
                 <a:solidFill>
                   <a:srgbClr val="475569"/>
                 </a:solidFill>
@@ -5739,14 +5808,14 @@
           <a:noFill/>
         </p:spPr>
         <p:txBody>
-          <a:bodyPr wrap="none" lIns="0" rIns="0" tIns="0" bIns="0" anchor="t">
+          <a:bodyPr wrap="none" lIns="0" tIns="0" rIns="0" bIns="0" anchor="t">
             <a:spAutoFit/>
           </a:bodyPr>
           <a:lstStyle/>
           <a:p>
             <a:pPr algn="l"/>
             <a:r>
-              <a:rPr b="0" sz="1125" i="0" u="none">
+              <a:rPr sz="1125" b="0" i="0" u="none">
                 <a:solidFill>
                   <a:srgbClr val="475569"/>
                 </a:solidFill>
@@ -5774,7 +5843,7 @@
           <a:noFill/>
         </p:spPr>
         <p:txBody>
-          <a:bodyPr wrap="none" lIns="76200" rIns="0" tIns="0" bIns="0" anchor="t">
+          <a:bodyPr wrap="none" lIns="76200" tIns="0" rIns="0" bIns="0" anchor="t">
             <a:spAutoFit/>
           </a:bodyPr>
           <a:lstStyle/>
@@ -5785,7 +5854,7 @@
               </a:lnSpc>
             </a:pPr>
             <a:r>
-              <a:rPr b="0" sz="1125" i="0" u="none">
+              <a:rPr sz="1125" b="0" i="0" u="none">
                 <a:solidFill>
                   <a:srgbClr val="475569"/>
                 </a:solidFill>
@@ -5813,14 +5882,14 @@
           <a:noFill/>
         </p:spPr>
         <p:txBody>
-          <a:bodyPr wrap="none" lIns="0" rIns="0" tIns="0" bIns="0" anchor="t">
+          <a:bodyPr wrap="none" lIns="0" tIns="0" rIns="0" bIns="0" anchor="t">
             <a:spAutoFit/>
           </a:bodyPr>
           <a:lstStyle/>
           <a:p>
             <a:pPr algn="l"/>
             <a:r>
-              <a:rPr b="0" sz="1125" i="0" u="none">
+              <a:rPr sz="1125" b="0" i="0" u="none">
                 <a:solidFill>
                   <a:srgbClr val="475569"/>
                 </a:solidFill>
@@ -5848,7 +5917,7 @@
           <a:noFill/>
         </p:spPr>
         <p:txBody>
-          <a:bodyPr wrap="none" lIns="76200" rIns="0" tIns="0" bIns="0" anchor="t">
+          <a:bodyPr wrap="none" lIns="76200" tIns="0" rIns="0" bIns="0" anchor="t">
             <a:spAutoFit/>
           </a:bodyPr>
           <a:lstStyle/>
@@ -5859,7 +5928,7 @@
               </a:lnSpc>
             </a:pPr>
             <a:r>
-              <a:rPr b="0" sz="1125" i="0" u="none">
+              <a:rPr sz="1125" b="0" i="0" u="none">
                 <a:solidFill>
                   <a:srgbClr val="475569"/>
                 </a:solidFill>
@@ -5879,7 +5948,7 @@
 </file>
 
 <file path=ppt/slides/slide4.xml><?xml version="1.0" encoding="utf-8"?>
-<p:sld xmlns:a="http://schemas.openxmlformats.org/drawingml/2006/main" xmlns:p="http://schemas.openxmlformats.org/presentationml/2006/main" xmlns:r="http://schemas.openxmlformats.org/officeDocument/2006/relationships">
+<p:sld xmlns:a="http://schemas.openxmlformats.org/drawingml/2006/main" xmlns:r="http://schemas.openxmlformats.org/officeDocument/2006/relationships" xmlns:p="http://schemas.openxmlformats.org/presentationml/2006/main">
   <p:cSld>
     <p:bg>
       <p:bgPr>
@@ -5895,7 +5964,14 @@
         <p:cNvGrpSpPr/>
         <p:nvPr/>
       </p:nvGrpSpPr>
-      <p:grpSpPr/>
+      <p:grpSpPr>
+        <a:xfrm>
+          <a:off x="0" y="0"/>
+          <a:ext cx="0" cy="0"/>
+          <a:chOff x="0" y="0"/>
+          <a:chExt cx="0" cy="0"/>
+        </a:xfrm>
+      </p:grpSpPr>
       <p:sp>
         <p:nvSpPr>
           <p:cNvPr id="2" name="Rectangle 1"/>
@@ -5935,6 +6011,7 @@
           <a:lstStyle/>
           <a:p>
             <a:pPr algn="ctr"/>
+            <a:endParaRPr/>
           </a:p>
         </p:txBody>
       </p:sp>
@@ -5981,6 +6058,7 @@
           <a:lstStyle/>
           <a:p>
             <a:pPr algn="ctr"/>
+            <a:endParaRPr/>
           </a:p>
         </p:txBody>
       </p:sp>
@@ -6027,6 +6105,7 @@
           <a:lstStyle/>
           <a:p>
             <a:pPr algn="ctr"/>
+            <a:endParaRPr/>
           </a:p>
         </p:txBody>
       </p:sp>
@@ -6073,6 +6152,7 @@
           <a:lstStyle/>
           <a:p>
             <a:pPr algn="ctr"/>
+            <a:endParaRPr/>
           </a:p>
         </p:txBody>
       </p:sp>
@@ -6117,6 +6197,7 @@
           <a:lstStyle/>
           <a:p>
             <a:pPr algn="ctr"/>
+            <a:endParaRPr/>
           </a:p>
         </p:txBody>
       </p:sp>
@@ -6161,6 +6242,7 @@
           <a:lstStyle/>
           <a:p>
             <a:pPr algn="ctr"/>
+            <a:endParaRPr/>
           </a:p>
         </p:txBody>
       </p:sp>
@@ -6205,6 +6287,7 @@
           <a:lstStyle/>
           <a:p>
             <a:pPr algn="ctr"/>
+            <a:endParaRPr/>
           </a:p>
         </p:txBody>
       </p:sp>
@@ -6249,6 +6332,7 @@
           <a:lstStyle/>
           <a:p>
             <a:pPr algn="ctr"/>
+            <a:endParaRPr/>
           </a:p>
         </p:txBody>
       </p:sp>
@@ -6293,6 +6377,7 @@
           <a:lstStyle/>
           <a:p>
             <a:pPr algn="ctr"/>
+            <a:endParaRPr/>
           </a:p>
         </p:txBody>
       </p:sp>
@@ -6337,6 +6422,7 @@
           <a:lstStyle/>
           <a:p>
             <a:pPr algn="ctr"/>
+            <a:endParaRPr/>
           </a:p>
         </p:txBody>
       </p:sp>
@@ -6381,6 +6467,7 @@
           <a:lstStyle/>
           <a:p>
             <a:pPr algn="ctr"/>
+            <a:endParaRPr/>
           </a:p>
         </p:txBody>
       </p:sp>
@@ -6425,6 +6512,7 @@
           <a:lstStyle/>
           <a:p>
             <a:pPr algn="ctr"/>
+            <a:endParaRPr/>
           </a:p>
         </p:txBody>
       </p:sp>
@@ -6469,6 +6557,7 @@
           <a:lstStyle/>
           <a:p>
             <a:pPr algn="ctr"/>
+            <a:endParaRPr/>
           </a:p>
         </p:txBody>
       </p:sp>
@@ -6513,6 +6602,7 @@
           <a:lstStyle/>
           <a:p>
             <a:pPr algn="ctr"/>
+            <a:endParaRPr/>
           </a:p>
         </p:txBody>
       </p:sp>
@@ -6557,6 +6647,7 @@
           <a:lstStyle/>
           <a:p>
             <a:pPr algn="ctr"/>
+            <a:endParaRPr/>
           </a:p>
         </p:txBody>
       </p:sp>
@@ -6601,6 +6692,7 @@
           <a:lstStyle/>
           <a:p>
             <a:pPr algn="ctr"/>
+            <a:endParaRPr/>
           </a:p>
         </p:txBody>
       </p:sp>
@@ -6645,6 +6737,7 @@
           <a:lstStyle/>
           <a:p>
             <a:pPr algn="ctr"/>
+            <a:endParaRPr/>
           </a:p>
         </p:txBody>
       </p:sp>
@@ -6809,14 +6902,14 @@
           <a:noFill/>
         </p:spPr>
         <p:txBody>
-          <a:bodyPr wrap="none" lIns="0" rIns="0" tIns="0" bIns="0" anchor="ctr">
+          <a:bodyPr wrap="none" lIns="0" tIns="0" rIns="0" bIns="0" anchor="ctr">
             <a:spAutoFit/>
           </a:bodyPr>
           <a:lstStyle/>
           <a:p>
             <a:pPr algn="l"/>
             <a:r>
-              <a:rPr b="1" sz="975" i="0" u="none">
+              <a:rPr sz="975" b="1" i="0" u="none">
                 <a:solidFill>
                   <a:srgbClr val="4F46E5"/>
                 </a:solidFill>
@@ -6844,7 +6937,7 @@
           <a:noFill/>
         </p:spPr>
         <p:txBody>
-          <a:bodyPr wrap="none" lIns="0" rIns="0" tIns="0" bIns="0" anchor="t">
+          <a:bodyPr wrap="none" lIns="0" tIns="0" rIns="0" bIns="0" anchor="t">
             <a:spAutoFit/>
           </a:bodyPr>
           <a:lstStyle/>
@@ -6855,7 +6948,7 @@
               </a:lnSpc>
             </a:pPr>
             <a:r>
-              <a:rPr b="1" sz="2850" i="0" u="none">
+              <a:rPr sz="2850" b="1" i="0" u="none">
                 <a:solidFill>
                   <a:srgbClr val="0F172A"/>
                 </a:solidFill>
@@ -6883,14 +6976,14 @@
           <a:noFill/>
         </p:spPr>
         <p:txBody>
-          <a:bodyPr wrap="none" lIns="0" rIns="0" tIns="0" bIns="0" anchor="t">
+          <a:bodyPr wrap="none" lIns="0" tIns="0" rIns="0" bIns="0" anchor="t">
             <a:spAutoFit/>
           </a:bodyPr>
           <a:lstStyle/>
           <a:p>
             <a:pPr algn="l"/>
             <a:r>
-              <a:rPr b="0" sz="900" i="0" u="none">
+              <a:rPr sz="900" b="0" i="0" u="none">
                 <a:solidFill>
                   <a:srgbClr val="0F172A"/>
                 </a:solidFill>
@@ -6918,14 +7011,14 @@
           <a:noFill/>
         </p:spPr>
         <p:txBody>
-          <a:bodyPr wrap="none" lIns="0" rIns="0" tIns="0" bIns="0" anchor="t">
+          <a:bodyPr wrap="none" lIns="0" tIns="0" rIns="0" bIns="0" anchor="t">
             <a:spAutoFit/>
           </a:bodyPr>
           <a:lstStyle/>
           <a:p>
             <a:pPr algn="l"/>
             <a:r>
-              <a:rPr b="0" sz="900" i="0" u="none">
+              <a:rPr sz="900" b="0" i="0" u="none">
                 <a:solidFill>
                   <a:srgbClr val="0F172A"/>
                 </a:solidFill>
@@ -6953,14 +7046,14 @@
           <a:noFill/>
         </p:spPr>
         <p:txBody>
-          <a:bodyPr wrap="none" lIns="0" rIns="0" tIns="0" bIns="0" anchor="t">
+          <a:bodyPr wrap="none" lIns="0" tIns="0" rIns="0" bIns="0" anchor="t">
             <a:spAutoFit/>
           </a:bodyPr>
           <a:lstStyle/>
           <a:p>
             <a:pPr algn="l"/>
             <a:r>
-              <a:rPr b="1" sz="1350" i="0" u="none">
+              <a:rPr sz="1350" b="1" i="0" u="none">
                 <a:solidFill>
                   <a:srgbClr val="0F172A"/>
                 </a:solidFill>
@@ -6988,7 +7081,7 @@
           <a:noFill/>
         </p:spPr>
         <p:txBody>
-          <a:bodyPr wrap="square" lIns="0" rIns="0" tIns="0" bIns="0" anchor="t">
+          <a:bodyPr wrap="square" lIns="0" tIns="0" rIns="0" bIns="0" anchor="t">
             <a:spAutoFit/>
           </a:bodyPr>
           <a:lstStyle/>
@@ -6999,7 +7092,7 @@
               </a:lnSpc>
             </a:pPr>
             <a:r>
-              <a:rPr b="0" sz="1125" i="0" u="none">
+              <a:rPr sz="1125" b="0" i="0" u="none">
                 <a:solidFill>
                   <a:srgbClr val="475569"/>
                 </a:solidFill>
@@ -7027,14 +7120,14 @@
           <a:noFill/>
         </p:spPr>
         <p:txBody>
-          <a:bodyPr wrap="none" lIns="0" rIns="0" tIns="0" bIns="0" anchor="t">
+          <a:bodyPr wrap="none" lIns="0" tIns="0" rIns="0" bIns="0" anchor="t">
             <a:spAutoFit/>
           </a:bodyPr>
           <a:lstStyle/>
           <a:p>
             <a:pPr algn="l"/>
             <a:r>
-              <a:rPr b="1" sz="1350" i="0" u="none">
+              <a:rPr sz="1350" b="1" i="0" u="none">
                 <a:solidFill>
                   <a:srgbClr val="0F172A"/>
                 </a:solidFill>
@@ -7062,7 +7155,7 @@
           <a:noFill/>
         </p:spPr>
         <p:txBody>
-          <a:bodyPr wrap="square" lIns="0" rIns="0" tIns="0" bIns="0" anchor="t">
+          <a:bodyPr wrap="square" lIns="0" tIns="0" rIns="0" bIns="0" anchor="t">
             <a:spAutoFit/>
           </a:bodyPr>
           <a:lstStyle/>
@@ -7073,7 +7166,7 @@
               </a:lnSpc>
             </a:pPr>
             <a:r>
-              <a:rPr b="0" sz="1125" i="0" u="none">
+              <a:rPr sz="1125" b="0" i="0" u="none">
                 <a:solidFill>
                   <a:srgbClr val="475569"/>
                 </a:solidFill>
@@ -7101,14 +7194,14 @@
           <a:noFill/>
         </p:spPr>
         <p:txBody>
-          <a:bodyPr wrap="none" lIns="0" rIns="0" tIns="0" bIns="0" anchor="t">
+          <a:bodyPr wrap="none" lIns="0" tIns="0" rIns="0" bIns="0" anchor="t">
             <a:spAutoFit/>
           </a:bodyPr>
           <a:lstStyle/>
           <a:p>
             <a:pPr algn="l"/>
             <a:r>
-              <a:rPr b="1" sz="1350" i="0" u="none">
+              <a:rPr sz="1350" b="1" i="0" u="none">
                 <a:solidFill>
                   <a:srgbClr val="0F172A"/>
                 </a:solidFill>
@@ -7136,7 +7229,7 @@
           <a:noFill/>
         </p:spPr>
         <p:txBody>
-          <a:bodyPr wrap="square" lIns="0" rIns="0" tIns="0" bIns="0" anchor="t">
+          <a:bodyPr wrap="square" lIns="0" tIns="0" rIns="0" bIns="0" anchor="t">
             <a:spAutoFit/>
           </a:bodyPr>
           <a:lstStyle/>
@@ -7147,7 +7240,7 @@
               </a:lnSpc>
             </a:pPr>
             <a:r>
-              <a:rPr b="0" sz="1125" i="0" u="none">
+              <a:rPr sz="1125" b="0" i="0" u="none">
                 <a:solidFill>
                   <a:srgbClr val="475569"/>
                 </a:solidFill>
@@ -7167,7 +7260,7 @@
 </file>
 
 <file path=ppt/slides/slide5.xml><?xml version="1.0" encoding="utf-8"?>
-<p:sld xmlns:a="http://schemas.openxmlformats.org/drawingml/2006/main" xmlns:p="http://schemas.openxmlformats.org/presentationml/2006/main" xmlns:r="http://schemas.openxmlformats.org/officeDocument/2006/relationships">
+<p:sld xmlns:a="http://schemas.openxmlformats.org/drawingml/2006/main" xmlns:r="http://schemas.openxmlformats.org/officeDocument/2006/relationships" xmlns:p="http://schemas.openxmlformats.org/presentationml/2006/main">
   <p:cSld>
     <p:bg>
       <p:bgPr>
@@ -7183,7 +7276,14 @@
         <p:cNvGrpSpPr/>
         <p:nvPr/>
       </p:nvGrpSpPr>
-      <p:grpSpPr/>
+      <p:grpSpPr>
+        <a:xfrm>
+          <a:off x="0" y="0"/>
+          <a:ext cx="0" cy="0"/>
+          <a:chOff x="0" y="0"/>
+          <a:chExt cx="0" cy="0"/>
+        </a:xfrm>
+      </p:grpSpPr>
       <p:sp>
         <p:nvSpPr>
           <p:cNvPr id="2" name="Rectangle 1"/>
@@ -7223,6 +7323,7 @@
           <a:lstStyle/>
           <a:p>
             <a:pPr algn="ctr"/>
+            <a:endParaRPr/>
           </a:p>
         </p:txBody>
       </p:sp>
@@ -7269,6 +7370,7 @@
           <a:lstStyle/>
           <a:p>
             <a:pPr algn="ctr"/>
+            <a:endParaRPr/>
           </a:p>
         </p:txBody>
       </p:sp>
@@ -7315,6 +7417,7 @@
           <a:lstStyle/>
           <a:p>
             <a:pPr algn="ctr"/>
+            <a:endParaRPr/>
           </a:p>
         </p:txBody>
       </p:sp>
@@ -7361,6 +7464,7 @@
           <a:lstStyle/>
           <a:p>
             <a:pPr algn="ctr"/>
+            <a:endParaRPr/>
           </a:p>
         </p:txBody>
       </p:sp>
@@ -7405,6 +7509,7 @@
           <a:lstStyle/>
           <a:p>
             <a:pPr algn="ctr"/>
+            <a:endParaRPr/>
           </a:p>
         </p:txBody>
       </p:sp>
@@ -7449,6 +7554,7 @@
           <a:lstStyle/>
           <a:p>
             <a:pPr algn="ctr"/>
+            <a:endParaRPr/>
           </a:p>
         </p:txBody>
       </p:sp>
@@ -7493,6 +7599,7 @@
           <a:lstStyle/>
           <a:p>
             <a:pPr algn="ctr"/>
+            <a:endParaRPr/>
           </a:p>
         </p:txBody>
       </p:sp>
@@ -7537,6 +7644,7 @@
           <a:lstStyle/>
           <a:p>
             <a:pPr algn="ctr"/>
+            <a:endParaRPr/>
           </a:p>
         </p:txBody>
       </p:sp>
@@ -7581,6 +7689,7 @@
           <a:lstStyle/>
           <a:p>
             <a:pPr algn="ctr"/>
+            <a:endParaRPr/>
           </a:p>
         </p:txBody>
       </p:sp>
@@ -7625,6 +7734,7 @@
           <a:lstStyle/>
           <a:p>
             <a:pPr algn="ctr"/>
+            <a:endParaRPr/>
           </a:p>
         </p:txBody>
       </p:sp>
@@ -7669,6 +7779,7 @@
           <a:lstStyle/>
           <a:p>
             <a:pPr algn="ctr"/>
+            <a:endParaRPr/>
           </a:p>
         </p:txBody>
       </p:sp>
@@ -7713,6 +7824,7 @@
           <a:lstStyle/>
           <a:p>
             <a:pPr algn="ctr"/>
+            <a:endParaRPr/>
           </a:p>
         </p:txBody>
       </p:sp>
@@ -7757,6 +7869,7 @@
           <a:lstStyle/>
           <a:p>
             <a:pPr algn="ctr"/>
+            <a:endParaRPr/>
           </a:p>
         </p:txBody>
       </p:sp>
@@ -7801,6 +7914,7 @@
           <a:lstStyle/>
           <a:p>
             <a:pPr algn="ctr"/>
+            <a:endParaRPr/>
           </a:p>
         </p:txBody>
       </p:sp>
@@ -7845,6 +7959,7 @@
           <a:lstStyle/>
           <a:p>
             <a:pPr algn="ctr"/>
+            <a:endParaRPr/>
           </a:p>
         </p:txBody>
       </p:sp>
@@ -7889,6 +8004,7 @@
           <a:lstStyle/>
           <a:p>
             <a:pPr algn="ctr"/>
+            <a:endParaRPr/>
           </a:p>
         </p:txBody>
       </p:sp>
@@ -7933,6 +8049,7 @@
           <a:lstStyle/>
           <a:p>
             <a:pPr algn="ctr"/>
+            <a:endParaRPr/>
           </a:p>
         </p:txBody>
       </p:sp>
@@ -8097,14 +8214,14 @@
           <a:noFill/>
         </p:spPr>
         <p:txBody>
-          <a:bodyPr wrap="none" lIns="0" rIns="0" tIns="0" bIns="0" anchor="ctr">
+          <a:bodyPr wrap="none" lIns="0" tIns="0" rIns="0" bIns="0" anchor="ctr">
             <a:spAutoFit/>
           </a:bodyPr>
           <a:lstStyle/>
           <a:p>
             <a:pPr algn="l"/>
             <a:r>
-              <a:rPr b="1" sz="975" i="0" u="none">
+              <a:rPr sz="975" b="1" i="0" u="none">
                 <a:solidFill>
                   <a:srgbClr val="4F46E5"/>
                 </a:solidFill>
@@ -8132,7 +8249,7 @@
           <a:noFill/>
         </p:spPr>
         <p:txBody>
-          <a:bodyPr wrap="none" lIns="0" rIns="0" tIns="0" bIns="0" anchor="t">
+          <a:bodyPr wrap="none" lIns="0" tIns="0" rIns="0" bIns="0" anchor="t">
             <a:spAutoFit/>
           </a:bodyPr>
           <a:lstStyle/>
@@ -8143,7 +8260,7 @@
               </a:lnSpc>
             </a:pPr>
             <a:r>
-              <a:rPr b="1" sz="2850" i="0" u="none">
+              <a:rPr sz="2850" b="1" i="0" u="none">
                 <a:solidFill>
                   <a:srgbClr val="0F172A"/>
                 </a:solidFill>
@@ -8171,14 +8288,14 @@
           <a:noFill/>
         </p:spPr>
         <p:txBody>
-          <a:bodyPr wrap="none" lIns="0" rIns="0" tIns="0" bIns="0" anchor="t">
+          <a:bodyPr wrap="none" lIns="0" tIns="0" rIns="0" bIns="0" anchor="t">
             <a:spAutoFit/>
           </a:bodyPr>
           <a:lstStyle/>
           <a:p>
             <a:pPr algn="l"/>
             <a:r>
-              <a:rPr b="0" sz="900" i="0" u="none">
+              <a:rPr sz="900" b="0" i="0" u="none">
                 <a:solidFill>
                   <a:srgbClr val="0F172A"/>
                 </a:solidFill>
@@ -8206,14 +8323,14 @@
           <a:noFill/>
         </p:spPr>
         <p:txBody>
-          <a:bodyPr wrap="none" lIns="0" rIns="0" tIns="0" bIns="0" anchor="t">
+          <a:bodyPr wrap="none" lIns="0" tIns="0" rIns="0" bIns="0" anchor="t">
             <a:spAutoFit/>
           </a:bodyPr>
           <a:lstStyle/>
           <a:p>
             <a:pPr algn="l"/>
             <a:r>
-              <a:rPr b="0" sz="900" i="0" u="none">
+              <a:rPr sz="900" b="0" i="0" u="none">
                 <a:solidFill>
                   <a:srgbClr val="0F172A"/>
                 </a:solidFill>
@@ -8241,14 +8358,14 @@
           <a:noFill/>
         </p:spPr>
         <p:txBody>
-          <a:bodyPr wrap="none" lIns="0" rIns="0" tIns="0" bIns="0" anchor="t">
+          <a:bodyPr wrap="none" lIns="0" tIns="0" rIns="0" bIns="0" anchor="t">
             <a:spAutoFit/>
           </a:bodyPr>
           <a:lstStyle/>
           <a:p>
             <a:pPr algn="l"/>
             <a:r>
-              <a:rPr b="1" sz="1350" i="0" u="none">
+              <a:rPr sz="1350" b="1" i="0" u="none">
                 <a:solidFill>
                   <a:srgbClr val="0F172A"/>
                 </a:solidFill>
@@ -8276,7 +8393,7 @@
           <a:noFill/>
         </p:spPr>
         <p:txBody>
-          <a:bodyPr wrap="square" lIns="0" rIns="0" tIns="0" bIns="0" anchor="t">
+          <a:bodyPr wrap="square" lIns="0" tIns="0" rIns="0" bIns="0" anchor="t">
             <a:spAutoFit/>
           </a:bodyPr>
           <a:lstStyle/>
@@ -8287,7 +8404,7 @@
               </a:lnSpc>
             </a:pPr>
             <a:r>
-              <a:rPr b="0" sz="1125" i="0" u="none">
+              <a:rPr sz="1125" b="0" i="0" u="none">
                 <a:solidFill>
                   <a:srgbClr val="475569"/>
                 </a:solidFill>
@@ -8315,14 +8432,14 @@
           <a:noFill/>
         </p:spPr>
         <p:txBody>
-          <a:bodyPr wrap="none" lIns="0" rIns="0" tIns="0" bIns="0" anchor="t">
+          <a:bodyPr wrap="none" lIns="0" tIns="0" rIns="0" bIns="0" anchor="t">
             <a:spAutoFit/>
           </a:bodyPr>
           <a:lstStyle/>
           <a:p>
             <a:pPr algn="l"/>
             <a:r>
-              <a:rPr b="1" sz="1350" i="0" u="none">
+              <a:rPr sz="1350" b="1" i="0" u="none">
                 <a:solidFill>
                   <a:srgbClr val="0F172A"/>
                 </a:solidFill>
@@ -8350,7 +8467,7 @@
           <a:noFill/>
         </p:spPr>
         <p:txBody>
-          <a:bodyPr wrap="square" lIns="0" rIns="0" tIns="0" bIns="0" anchor="t">
+          <a:bodyPr wrap="square" lIns="0" tIns="0" rIns="0" bIns="0" anchor="t">
             <a:spAutoFit/>
           </a:bodyPr>
           <a:lstStyle/>
@@ -8361,7 +8478,7 @@
               </a:lnSpc>
             </a:pPr>
             <a:r>
-              <a:rPr b="0" sz="1125" i="0" u="none">
+              <a:rPr sz="1125" b="0" i="0" u="none">
                 <a:solidFill>
                   <a:srgbClr val="475569"/>
                 </a:solidFill>
@@ -8389,14 +8506,14 @@
           <a:noFill/>
         </p:spPr>
         <p:txBody>
-          <a:bodyPr wrap="none" lIns="0" rIns="0" tIns="0" bIns="0" anchor="t">
+          <a:bodyPr wrap="none" lIns="0" tIns="0" rIns="0" bIns="0" anchor="t">
             <a:spAutoFit/>
           </a:bodyPr>
           <a:lstStyle/>
           <a:p>
             <a:pPr algn="l"/>
             <a:r>
-              <a:rPr b="1" sz="1350" i="0" u="none">
+              <a:rPr sz="1350" b="1" i="0" u="none">
                 <a:solidFill>
                   <a:srgbClr val="0F172A"/>
                 </a:solidFill>
@@ -8424,7 +8541,7 @@
           <a:noFill/>
         </p:spPr>
         <p:txBody>
-          <a:bodyPr wrap="square" lIns="0" rIns="0" tIns="0" bIns="0" anchor="t">
+          <a:bodyPr wrap="square" lIns="0" tIns="0" rIns="0" bIns="0" anchor="t">
             <a:spAutoFit/>
           </a:bodyPr>
           <a:lstStyle/>
@@ -8435,7 +8552,7 @@
               </a:lnSpc>
             </a:pPr>
             <a:r>
-              <a:rPr b="0" sz="1125" i="0" u="none">
+              <a:rPr sz="1125" b="0" i="0" u="none">
                 <a:solidFill>
                   <a:srgbClr val="475569"/>
                 </a:solidFill>
@@ -8455,7 +8572,7 @@
 </file>
 
 <file path=ppt/slides/slide6.xml><?xml version="1.0" encoding="utf-8"?>
-<p:sld xmlns:a="http://schemas.openxmlformats.org/drawingml/2006/main" xmlns:p="http://schemas.openxmlformats.org/presentationml/2006/main" xmlns:r="http://schemas.openxmlformats.org/officeDocument/2006/relationships">
+<p:sld xmlns:a="http://schemas.openxmlformats.org/drawingml/2006/main" xmlns:r="http://schemas.openxmlformats.org/officeDocument/2006/relationships" xmlns:p="http://schemas.openxmlformats.org/presentationml/2006/main">
   <p:cSld>
     <p:bg>
       <p:bgPr>
@@ -8471,7 +8588,14 @@
         <p:cNvGrpSpPr/>
         <p:nvPr/>
       </p:nvGrpSpPr>
-      <p:grpSpPr/>
+      <p:grpSpPr>
+        <a:xfrm>
+          <a:off x="0" y="0"/>
+          <a:ext cx="0" cy="0"/>
+          <a:chOff x="0" y="0"/>
+          <a:chExt cx="0" cy="0"/>
+        </a:xfrm>
+      </p:grpSpPr>
       <p:sp>
         <p:nvSpPr>
           <p:cNvPr id="2" name="Rectangle 1"/>
@@ -8511,6 +8635,7 @@
           <a:lstStyle/>
           <a:p>
             <a:pPr algn="ctr"/>
+            <a:endParaRPr/>
           </a:p>
         </p:txBody>
       </p:sp>
@@ -8557,6 +8682,7 @@
           <a:lstStyle/>
           <a:p>
             <a:pPr algn="ctr"/>
+            <a:endParaRPr/>
           </a:p>
         </p:txBody>
       </p:sp>
@@ -8603,6 +8729,7 @@
           <a:lstStyle/>
           <a:p>
             <a:pPr algn="ctr"/>
+            <a:endParaRPr/>
           </a:p>
         </p:txBody>
       </p:sp>
@@ -8649,6 +8776,7 @@
           <a:lstStyle/>
           <a:p>
             <a:pPr algn="ctr"/>
+            <a:endParaRPr/>
           </a:p>
         </p:txBody>
       </p:sp>
@@ -8693,6 +8821,7 @@
           <a:lstStyle/>
           <a:p>
             <a:pPr algn="ctr"/>
+            <a:endParaRPr/>
           </a:p>
         </p:txBody>
       </p:sp>
@@ -8737,6 +8866,7 @@
           <a:lstStyle/>
           <a:p>
             <a:pPr algn="ctr"/>
+            <a:endParaRPr/>
           </a:p>
         </p:txBody>
       </p:sp>
@@ -8781,6 +8911,7 @@
           <a:lstStyle/>
           <a:p>
             <a:pPr algn="ctr"/>
+            <a:endParaRPr/>
           </a:p>
         </p:txBody>
       </p:sp>
@@ -8825,6 +8956,7 @@
           <a:lstStyle/>
           <a:p>
             <a:pPr algn="ctr"/>
+            <a:endParaRPr/>
           </a:p>
         </p:txBody>
       </p:sp>
@@ -8869,6 +9001,7 @@
           <a:lstStyle/>
           <a:p>
             <a:pPr algn="ctr"/>
+            <a:endParaRPr/>
           </a:p>
         </p:txBody>
       </p:sp>
@@ -8913,6 +9046,7 @@
           <a:lstStyle/>
           <a:p>
             <a:pPr algn="ctr"/>
+            <a:endParaRPr/>
           </a:p>
         </p:txBody>
       </p:sp>
@@ -8957,6 +9091,7 @@
           <a:lstStyle/>
           <a:p>
             <a:pPr algn="ctr"/>
+            <a:endParaRPr/>
           </a:p>
         </p:txBody>
       </p:sp>
@@ -9001,6 +9136,7 @@
           <a:lstStyle/>
           <a:p>
             <a:pPr algn="ctr"/>
+            <a:endParaRPr/>
           </a:p>
         </p:txBody>
       </p:sp>
@@ -9045,6 +9181,7 @@
           <a:lstStyle/>
           <a:p>
             <a:pPr algn="ctr"/>
+            <a:endParaRPr/>
           </a:p>
         </p:txBody>
       </p:sp>
@@ -9089,6 +9226,7 @@
           <a:lstStyle/>
           <a:p>
             <a:pPr algn="ctr"/>
+            <a:endParaRPr/>
           </a:p>
         </p:txBody>
       </p:sp>
@@ -9133,6 +9271,7 @@
           <a:lstStyle/>
           <a:p>
             <a:pPr algn="ctr"/>
+            <a:endParaRPr/>
           </a:p>
         </p:txBody>
       </p:sp>
@@ -9177,6 +9316,7 @@
           <a:lstStyle/>
           <a:p>
             <a:pPr algn="ctr"/>
+            <a:endParaRPr/>
           </a:p>
         </p:txBody>
       </p:sp>
@@ -9221,6 +9361,7 @@
           <a:lstStyle/>
           <a:p>
             <a:pPr algn="ctr"/>
+            <a:endParaRPr/>
           </a:p>
         </p:txBody>
       </p:sp>
@@ -9385,14 +9526,14 @@
           <a:noFill/>
         </p:spPr>
         <p:txBody>
-          <a:bodyPr wrap="none" lIns="0" rIns="0" tIns="0" bIns="0" anchor="ctr">
+          <a:bodyPr wrap="none" lIns="0" tIns="0" rIns="0" bIns="0" anchor="ctr">
             <a:spAutoFit/>
           </a:bodyPr>
           <a:lstStyle/>
           <a:p>
             <a:pPr algn="l"/>
             <a:r>
-              <a:rPr b="1" sz="975" i="0" u="none">
+              <a:rPr sz="975" b="1" i="0" u="none">
                 <a:solidFill>
                   <a:srgbClr val="4F46E5"/>
                 </a:solidFill>
@@ -9420,7 +9561,7 @@
           <a:noFill/>
         </p:spPr>
         <p:txBody>
-          <a:bodyPr wrap="none" lIns="0" rIns="0" tIns="0" bIns="0" anchor="t">
+          <a:bodyPr wrap="none" lIns="0" tIns="0" rIns="0" bIns="0" anchor="t">
             <a:spAutoFit/>
           </a:bodyPr>
           <a:lstStyle/>
@@ -9431,7 +9572,7 @@
               </a:lnSpc>
             </a:pPr>
             <a:r>
-              <a:rPr b="1" sz="2850" i="0" u="none">
+              <a:rPr sz="2850" b="1" i="0" u="none">
                 <a:solidFill>
                   <a:srgbClr val="0F172A"/>
                 </a:solidFill>
@@ -9459,14 +9600,14 @@
           <a:noFill/>
         </p:spPr>
         <p:txBody>
-          <a:bodyPr wrap="none" lIns="0" rIns="0" tIns="0" bIns="0" anchor="t">
+          <a:bodyPr wrap="none" lIns="0" tIns="0" rIns="0" bIns="0" anchor="t">
             <a:spAutoFit/>
           </a:bodyPr>
           <a:lstStyle/>
           <a:p>
             <a:pPr algn="l"/>
             <a:r>
-              <a:rPr b="0" sz="900" i="0" u="none">
+              <a:rPr sz="900" b="0" i="0" u="none">
                 <a:solidFill>
                   <a:srgbClr val="0F172A"/>
                 </a:solidFill>
@@ -9494,14 +9635,14 @@
           <a:noFill/>
         </p:spPr>
         <p:txBody>
-          <a:bodyPr wrap="none" lIns="0" rIns="0" tIns="0" bIns="0" anchor="t">
+          <a:bodyPr wrap="none" lIns="0" tIns="0" rIns="0" bIns="0" anchor="t">
             <a:spAutoFit/>
           </a:bodyPr>
           <a:lstStyle/>
           <a:p>
             <a:pPr algn="l"/>
             <a:r>
-              <a:rPr b="0" sz="900" i="0" u="none">
+              <a:rPr sz="900" b="0" i="0" u="none">
                 <a:solidFill>
                   <a:srgbClr val="0F172A"/>
                 </a:solidFill>
@@ -9529,14 +9670,14 @@
           <a:noFill/>
         </p:spPr>
         <p:txBody>
-          <a:bodyPr wrap="none" lIns="0" rIns="0" tIns="0" bIns="0" anchor="t">
+          <a:bodyPr wrap="none" lIns="0" tIns="0" rIns="0" bIns="0" anchor="t">
             <a:spAutoFit/>
           </a:bodyPr>
           <a:lstStyle/>
           <a:p>
             <a:pPr algn="l"/>
             <a:r>
-              <a:rPr b="1" sz="1350" i="0" u="none">
+              <a:rPr sz="1350" b="1" i="0" u="none">
                 <a:solidFill>
                   <a:srgbClr val="0F172A"/>
                 </a:solidFill>
@@ -9564,7 +9705,7 @@
           <a:noFill/>
         </p:spPr>
         <p:txBody>
-          <a:bodyPr wrap="square" lIns="0" rIns="0" tIns="0" bIns="0" anchor="t">
+          <a:bodyPr wrap="square" lIns="0" tIns="0" rIns="0" bIns="0" anchor="t">
             <a:spAutoFit/>
           </a:bodyPr>
           <a:lstStyle/>
@@ -9575,7 +9716,7 @@
               </a:lnSpc>
             </a:pPr>
             <a:r>
-              <a:rPr b="0" sz="1125" i="0" u="none">
+              <a:rPr sz="1125" b="0" i="0" u="none">
                 <a:solidFill>
                   <a:srgbClr val="475569"/>
                 </a:solidFill>
@@ -9603,14 +9744,14 @@
           <a:noFill/>
         </p:spPr>
         <p:txBody>
-          <a:bodyPr wrap="none" lIns="0" rIns="0" tIns="0" bIns="0" anchor="t">
+          <a:bodyPr wrap="none" lIns="0" tIns="0" rIns="0" bIns="0" anchor="t">
             <a:spAutoFit/>
           </a:bodyPr>
           <a:lstStyle/>
           <a:p>
             <a:pPr algn="l"/>
             <a:r>
-              <a:rPr b="1" sz="1350" i="0" u="none">
+              <a:rPr sz="1350" b="1" i="0" u="none">
                 <a:solidFill>
                   <a:srgbClr val="0F172A"/>
                 </a:solidFill>
@@ -9638,7 +9779,7 @@
           <a:noFill/>
         </p:spPr>
         <p:txBody>
-          <a:bodyPr wrap="square" lIns="0" rIns="0" tIns="0" bIns="0" anchor="t">
+          <a:bodyPr wrap="square" lIns="0" tIns="0" rIns="0" bIns="0" anchor="t">
             <a:spAutoFit/>
           </a:bodyPr>
           <a:lstStyle/>
@@ -9649,7 +9790,7 @@
               </a:lnSpc>
             </a:pPr>
             <a:r>
-              <a:rPr b="0" sz="1125" i="0" u="none">
+              <a:rPr sz="1125" b="0" i="0" u="none">
                 <a:solidFill>
                   <a:srgbClr val="475569"/>
                 </a:solidFill>
@@ -9677,14 +9818,14 @@
           <a:noFill/>
         </p:spPr>
         <p:txBody>
-          <a:bodyPr wrap="none" lIns="0" rIns="0" tIns="0" bIns="0" anchor="t">
+          <a:bodyPr wrap="none" lIns="0" tIns="0" rIns="0" bIns="0" anchor="t">
             <a:spAutoFit/>
           </a:bodyPr>
           <a:lstStyle/>
           <a:p>
             <a:pPr algn="l"/>
             <a:r>
-              <a:rPr b="1" sz="1350" i="0" u="none">
+              <a:rPr sz="1350" b="1" i="0" u="none">
                 <a:solidFill>
                   <a:srgbClr val="0F172A"/>
                 </a:solidFill>
@@ -9712,7 +9853,7 @@
           <a:noFill/>
         </p:spPr>
         <p:txBody>
-          <a:bodyPr wrap="square" lIns="0" rIns="0" tIns="0" bIns="0" anchor="t">
+          <a:bodyPr wrap="square" lIns="0" tIns="0" rIns="0" bIns="0" anchor="t">
             <a:spAutoFit/>
           </a:bodyPr>
           <a:lstStyle/>
@@ -9723,7 +9864,7 @@
               </a:lnSpc>
             </a:pPr>
             <a:r>
-              <a:rPr b="0" sz="1125" i="0" u="none">
+              <a:rPr sz="1125" b="0" i="0" u="none">
                 <a:solidFill>
                   <a:srgbClr val="475569"/>
                 </a:solidFill>
@@ -9743,7 +9884,7 @@
 </file>
 
 <file path=ppt/slides/slide7.xml><?xml version="1.0" encoding="utf-8"?>
-<p:sld xmlns:a="http://schemas.openxmlformats.org/drawingml/2006/main" xmlns:p="http://schemas.openxmlformats.org/presentationml/2006/main" xmlns:r="http://schemas.openxmlformats.org/officeDocument/2006/relationships">
+<p:sld xmlns:a="http://schemas.openxmlformats.org/drawingml/2006/main" xmlns:r="http://schemas.openxmlformats.org/officeDocument/2006/relationships" xmlns:p="http://schemas.openxmlformats.org/presentationml/2006/main">
   <p:cSld>
     <p:bg>
       <p:bgPr>
@@ -9759,7 +9900,14 @@
         <p:cNvGrpSpPr/>
         <p:nvPr/>
       </p:nvGrpSpPr>
-      <p:grpSpPr/>
+      <p:grpSpPr>
+        <a:xfrm>
+          <a:off x="0" y="0"/>
+          <a:ext cx="0" cy="0"/>
+          <a:chOff x="0" y="0"/>
+          <a:chExt cx="0" cy="0"/>
+        </a:xfrm>
+      </p:grpSpPr>
       <p:sp>
         <p:nvSpPr>
           <p:cNvPr id="2" name="Rectangle 1"/>
@@ -9799,6 +9947,7 @@
           <a:lstStyle/>
           <a:p>
             <a:pPr algn="ctr"/>
+            <a:endParaRPr/>
           </a:p>
         </p:txBody>
       </p:sp>
@@ -9845,6 +9994,7 @@
           <a:lstStyle/>
           <a:p>
             <a:pPr algn="ctr"/>
+            <a:endParaRPr/>
           </a:p>
         </p:txBody>
       </p:sp>
@@ -9891,6 +10041,7 @@
           <a:lstStyle/>
           <a:p>
             <a:pPr algn="ctr"/>
+            <a:endParaRPr/>
           </a:p>
         </p:txBody>
       </p:sp>
@@ -9935,6 +10086,7 @@
           <a:lstStyle/>
           <a:p>
             <a:pPr algn="ctr"/>
+            <a:endParaRPr/>
           </a:p>
         </p:txBody>
       </p:sp>
@@ -9955,14 +10107,14 @@
           <a:noFill/>
         </p:spPr>
         <p:txBody>
-          <a:bodyPr wrap="none" lIns="0" rIns="0" tIns="0" bIns="0" anchor="ctr">
+          <a:bodyPr wrap="none" lIns="0" tIns="0" rIns="0" bIns="0" anchor="ctr">
             <a:spAutoFit/>
           </a:bodyPr>
           <a:lstStyle/>
           <a:p>
             <a:pPr algn="l"/>
             <a:r>
-              <a:rPr b="1" sz="975" i="0" u="none">
+              <a:rPr sz="975" b="1" i="0" u="none">
                 <a:solidFill>
                   <a:srgbClr val="4F46E5"/>
                 </a:solidFill>
@@ -9990,7 +10142,7 @@
           <a:noFill/>
         </p:spPr>
         <p:txBody>
-          <a:bodyPr wrap="none" lIns="0" rIns="0" tIns="0" bIns="0" anchor="t">
+          <a:bodyPr wrap="none" lIns="0" tIns="0" rIns="0" bIns="0" anchor="t">
             <a:spAutoFit/>
           </a:bodyPr>
           <a:lstStyle/>
@@ -10001,7 +10153,7 @@
               </a:lnSpc>
             </a:pPr>
             <a:r>
-              <a:rPr b="1" sz="2850" i="0" u="none">
+              <a:rPr sz="2850" b="1" i="0" u="none">
                 <a:solidFill>
                   <a:srgbClr val="0F172A"/>
                 </a:solidFill>
@@ -10029,7 +10181,7 @@
           <a:noFill/>
         </p:spPr>
         <p:txBody>
-          <a:bodyPr wrap="square" lIns="0" rIns="0" tIns="0" bIns="0" anchor="t">
+          <a:bodyPr wrap="square" lIns="0" tIns="0" rIns="0" bIns="0" anchor="t">
             <a:spAutoFit/>
           </a:bodyPr>
           <a:lstStyle/>
@@ -10040,7 +10192,7 @@
               </a:lnSpc>
             </a:pPr>
             <a:r>
-              <a:rPr b="0" sz="975" i="0" u="none">
+              <a:rPr sz="975" b="0" i="0" u="none">
                 <a:solidFill>
                   <a:srgbClr val="C084FC"/>
                 </a:solidFill>
@@ -10049,7 +10201,7 @@
               <a:t>public static boolean</a:t>
             </a:r>
             <a:r>
-              <a:rPr b="0" sz="975" i="0" u="none">
+              <a:rPr sz="975" b="0" i="0" u="none">
                 <a:solidFill>
                   <a:srgbClr val="E2E8F0"/>
                 </a:solidFill>
@@ -10058,7 +10210,7 @@
               <a:t> </a:t>
             </a:r>
             <a:r>
-              <a:rPr b="0" sz="975" i="0" u="none">
+              <a:rPr sz="975" b="0" i="0" u="none">
                 <a:solidFill>
                   <a:srgbClr val="60A5FA"/>
                 </a:solidFill>
@@ -10067,7 +10219,7 @@
               <a:t>checkAvailability</a:t>
             </a:r>
             <a:r>
-              <a:rPr b="0" sz="975" i="0" u="none">
+              <a:rPr sz="975" b="0" i="0" u="none">
                 <a:solidFill>
                   <a:srgbClr val="E2E8F0"/>
                 </a:solidFill>
@@ -10076,7 +10228,7 @@
               <a:t>(</a:t>
             </a:r>
             <a:r>
-              <a:rPr b="0" sz="975" i="0" u="none">
+              <a:rPr sz="975" b="0" i="0" u="none">
                 <a:solidFill>
                   <a:srgbClr val="C084FC"/>
                 </a:solidFill>
@@ -10085,7 +10237,7 @@
               <a:t>boolean</a:t>
             </a:r>
             <a:r>
-              <a:rPr b="0" sz="975" i="0" u="none">
+              <a:rPr sz="975" b="0" i="0" u="none">
                 <a:solidFill>
                   <a:srgbClr val="E2E8F0"/>
                 </a:solidFill>
@@ -10098,7 +10250,7 @@
 </a:t>
             </a:r>
             <a:r>
-              <a:rPr b="0" sz="975" i="0" u="none">
+              <a:rPr sz="975" b="0" i="0" u="none">
                 <a:solidFill>
                   <a:srgbClr val="E2E8F0"/>
                 </a:solidFill>
@@ -10107,7 +10259,7 @@
               <a:t>   </a:t>
             </a:r>
             <a:r>
-              <a:rPr b="0" sz="975" i="0" u="none">
+              <a:rPr sz="975" b="0" i="0" u="none">
                 <a:solidFill>
                   <a:srgbClr val="F472B6"/>
                 </a:solidFill>
@@ -10116,7 +10268,7 @@
               <a:t>for</a:t>
             </a:r>
             <a:r>
-              <a:rPr b="0" sz="975" i="0" u="none">
+              <a:rPr sz="975" b="0" i="0" u="none">
                 <a:solidFill>
                   <a:srgbClr val="E2E8F0"/>
                 </a:solidFill>
@@ -10125,7 +10277,7 @@
               <a:t> (</a:t>
             </a:r>
             <a:r>
-              <a:rPr b="0" sz="975" i="0" u="none">
+              <a:rPr sz="975" b="0" i="0" u="none">
                 <a:solidFill>
                   <a:srgbClr val="C084FC"/>
                 </a:solidFill>
@@ -10134,7 +10286,7 @@
               <a:t>int</a:t>
             </a:r>
             <a:r>
-              <a:rPr b="0" sz="975" i="0" u="none">
+              <a:rPr sz="975" b="0" i="0" u="none">
                 <a:solidFill>
                   <a:srgbClr val="E2E8F0"/>
                 </a:solidFill>
@@ -10143,7 +10295,7 @@
               <a:t> i = </a:t>
             </a:r>
             <a:r>
-              <a:rPr b="0" sz="975" i="0" u="none">
+              <a:rPr sz="975" b="0" i="0" u="none">
                 <a:solidFill>
                   <a:srgbClr val="38BDF8"/>
                 </a:solidFill>
@@ -10152,7 +10304,7 @@
               <a:t>0</a:t>
             </a:r>
             <a:r>
-              <a:rPr b="0" sz="975" i="0" u="none">
+              <a:rPr sz="975" b="0" i="0" u="none">
                 <a:solidFill>
                   <a:srgbClr val="E2E8F0"/>
                 </a:solidFill>
@@ -10165,7 +10317,7 @@
 </a:t>
             </a:r>
             <a:r>
-              <a:rPr b="0" sz="975" i="0" u="none">
+              <a:rPr sz="975" b="0" i="0" u="none">
                 <a:solidFill>
                   <a:srgbClr val="E2E8F0"/>
                 </a:solidFill>
@@ -10174,7 +10326,7 @@
               <a:t>     </a:t>
             </a:r>
             <a:r>
-              <a:rPr b="0" sz="975" i="0" u="none">
+              <a:rPr sz="975" b="0" i="0" u="none">
                 <a:solidFill>
                   <a:srgbClr val="F472B6"/>
                 </a:solidFill>
@@ -10183,7 +10335,7 @@
               <a:t>if</a:t>
             </a:r>
             <a:r>
-              <a:rPr b="0" sz="975" i="0" u="none">
+              <a:rPr sz="975" b="0" i="0" u="none">
                 <a:solidFill>
                   <a:srgbClr val="E2E8F0"/>
                 </a:solidFill>
@@ -10192,7 +10344,7 @@
               <a:t> (!slots[i]) </a:t>
             </a:r>
             <a:r>
-              <a:rPr b="0" sz="975" i="0" u="none">
+              <a:rPr sz="975" b="0" i="0" u="none">
                 <a:solidFill>
                   <a:srgbClr val="F472B6"/>
                 </a:solidFill>
@@ -10201,7 +10353,7 @@
               <a:t>return</a:t>
             </a:r>
             <a:r>
-              <a:rPr b="0" sz="975" i="0" u="none">
+              <a:rPr sz="975" b="0" i="0" u="none">
                 <a:solidFill>
                   <a:srgbClr val="E2E8F0"/>
                 </a:solidFill>
@@ -10210,7 +10362,7 @@
               <a:t> </a:t>
             </a:r>
             <a:r>
-              <a:rPr b="0" sz="975" i="0" u="none">
+              <a:rPr sz="975" b="0" i="0" u="none">
                 <a:solidFill>
                   <a:srgbClr val="38BDF8"/>
                 </a:solidFill>
@@ -10219,7 +10371,7 @@
               <a:t>true</a:t>
             </a:r>
             <a:r>
-              <a:rPr b="0" sz="975" i="0" u="none">
+              <a:rPr sz="975" b="0" i="0" u="none">
                 <a:solidFill>
                   <a:srgbClr val="E2E8F0"/>
                 </a:solidFill>
@@ -10232,7 +10384,7 @@
 </a:t>
             </a:r>
             <a:r>
-              <a:rPr b="0" sz="975" i="0" u="none">
+              <a:rPr sz="975" b="0" i="0" u="none">
                 <a:solidFill>
                   <a:srgbClr val="E2E8F0"/>
                 </a:solidFill>
@@ -10245,7 +10397,7 @@
 </a:t>
             </a:r>
             <a:r>
-              <a:rPr b="0" sz="975" i="0" u="none">
+              <a:rPr sz="975" b="0" i="0" u="none">
                 <a:solidFill>
                   <a:srgbClr val="E2E8F0"/>
                 </a:solidFill>
@@ -10254,7 +10406,7 @@
               <a:t>   </a:t>
             </a:r>
             <a:r>
-              <a:rPr b="0" sz="975" i="0" u="none">
+              <a:rPr sz="975" b="0" i="0" u="none">
                 <a:solidFill>
                   <a:srgbClr val="F472B6"/>
                 </a:solidFill>
@@ -10263,7 +10415,7 @@
               <a:t>return</a:t>
             </a:r>
             <a:r>
-              <a:rPr b="0" sz="975" i="0" u="none">
+              <a:rPr sz="975" b="0" i="0" u="none">
                 <a:solidFill>
                   <a:srgbClr val="E2E8F0"/>
                 </a:solidFill>
@@ -10272,7 +10424,7 @@
               <a:t> </a:t>
             </a:r>
             <a:r>
-              <a:rPr b="0" sz="975" i="0" u="none">
+              <a:rPr sz="975" b="0" i="0" u="none">
                 <a:solidFill>
                   <a:srgbClr val="38BDF8"/>
                 </a:solidFill>
@@ -10281,7 +10433,7 @@
               <a:t>false</a:t>
             </a:r>
             <a:r>
-              <a:rPr b="0" sz="975" i="0" u="none">
+              <a:rPr sz="975" b="0" i="0" u="none">
                 <a:solidFill>
                   <a:srgbClr val="E2E8F0"/>
                 </a:solidFill>
@@ -10294,7 +10446,7 @@
 </a:t>
             </a:r>
             <a:r>
-              <a:rPr b="0" sz="975" i="0" u="none">
+              <a:rPr sz="975" b="0" i="0" u="none">
                 <a:solidFill>
                   <a:srgbClr val="E2E8F0"/>
                 </a:solidFill>
@@ -10322,7 +10474,7 @@
           <a:noFill/>
         </p:spPr>
         <p:txBody>
-          <a:bodyPr wrap="square" lIns="0" rIns="0" tIns="0" bIns="0" anchor="t">
+          <a:bodyPr wrap="square" lIns="0" tIns="0" rIns="0" bIns="0" anchor="t">
             <a:spAutoFit/>
           </a:bodyPr>
           <a:lstStyle/>
@@ -10333,7 +10485,7 @@
               </a:lnSpc>
             </a:pPr>
             <a:r>
-              <a:rPr b="0" sz="975" i="0" u="none">
+              <a:rPr sz="975" b="0" i="0" u="none">
                 <a:solidFill>
                   <a:srgbClr val="C084FC"/>
                 </a:solidFill>
@@ -10342,7 +10494,7 @@
               <a:t>public static void</a:t>
             </a:r>
             <a:r>
-              <a:rPr b="0" sz="975" i="0" u="none">
+              <a:rPr sz="975" b="0" i="0" u="none">
                 <a:solidFill>
                   <a:srgbClr val="E2E8F0"/>
                 </a:solidFill>
@@ -10351,7 +10503,7 @@
               <a:t> </a:t>
             </a:r>
             <a:r>
-              <a:rPr b="0" sz="975" i="0" u="none">
+              <a:rPr sz="975" b="0" i="0" u="none">
                 <a:solidFill>
                   <a:srgbClr val="60A5FA"/>
                 </a:solidFill>
@@ -10360,7 +10512,7 @@
               <a:t>parkVehicle</a:t>
             </a:r>
             <a:r>
-              <a:rPr b="0" sz="975" i="0" u="none">
+              <a:rPr sz="975" b="0" i="0" u="none">
                 <a:solidFill>
                   <a:srgbClr val="E2E8F0"/>
                 </a:solidFill>
@@ -10369,7 +10521,7 @@
               <a:t>(String plate, </a:t>
             </a:r>
             <a:r>
-              <a:rPr b="0" sz="975" i="0" u="none">
+              <a:rPr sz="975" b="0" i="0" u="none">
                 <a:solidFill>
                   <a:srgbClr val="C084FC"/>
                 </a:solidFill>
@@ -10378,7 +10530,7 @@
               <a:t>boolean</a:t>
             </a:r>
             <a:r>
-              <a:rPr b="0" sz="975" i="0" u="none">
+              <a:rPr sz="975" b="0" i="0" u="none">
                 <a:solidFill>
                   <a:srgbClr val="E2E8F0"/>
                 </a:solidFill>
@@ -10391,7 +10543,7 @@
 </a:t>
             </a:r>
             <a:r>
-              <a:rPr b="0" sz="975" i="0" u="none">
+              <a:rPr sz="975" b="0" i="0" u="none">
                 <a:solidFill>
                   <a:srgbClr val="E2E8F0"/>
                 </a:solidFill>
@@ -10400,7 +10552,7 @@
               <a:t>   Scanner sc = </a:t>
             </a:r>
             <a:r>
-              <a:rPr b="0" sz="975" i="0" u="none">
+              <a:rPr sz="975" b="0" i="0" u="none">
                 <a:solidFill>
                   <a:srgbClr val="F472B6"/>
                 </a:solidFill>
@@ -10409,7 +10561,7 @@
               <a:t>new</a:t>
             </a:r>
             <a:r>
-              <a:rPr b="0" sz="975" i="0" u="none">
+              <a:rPr sz="975" b="0" i="0" u="none">
                 <a:solidFill>
                   <a:srgbClr val="E2E8F0"/>
                 </a:solidFill>
@@ -10422,7 +10574,7 @@
 </a:t>
             </a:r>
             <a:r>
-              <a:rPr b="0" sz="975" i="0" u="none">
+              <a:rPr sz="975" b="0" i="0" u="none">
                 <a:solidFill>
                   <a:srgbClr val="E2E8F0"/>
                 </a:solidFill>
@@ -10431,7 +10583,7 @@
               <a:t>   </a:t>
             </a:r>
             <a:r>
-              <a:rPr b="0" sz="975" i="0" u="none">
+              <a:rPr sz="975" b="0" i="0" u="none">
                 <a:solidFill>
                   <a:srgbClr val="38BDF8"/>
                 </a:solidFill>
@@ -10440,7 +10592,7 @@
               <a:t>System.out.println</a:t>
             </a:r>
             <a:r>
-              <a:rPr b="0" sz="975" i="0" u="none">
+              <a:rPr sz="975" b="0" i="0" u="none">
                 <a:solidFill>
                   <a:srgbClr val="E2E8F0"/>
                 </a:solidFill>
@@ -10449,7 +10601,7 @@
               <a:t>(</a:t>
             </a:r>
             <a:r>
-              <a:rPr b="0" sz="975" i="0" u="none">
+              <a:rPr sz="975" b="0" i="0" u="none">
                 <a:solidFill>
                   <a:srgbClr val="86EFAC"/>
                 </a:solidFill>
@@ -10458,7 +10610,7 @@
               <a:t>"Assigning slot for: "</a:t>
             </a:r>
             <a:r>
-              <a:rPr b="0" sz="975" i="0" u="none">
+              <a:rPr sz="975" b="0" i="0" u="none">
                 <a:solidFill>
                   <a:srgbClr val="E2E8F0"/>
                 </a:solidFill>
@@ -10471,7 +10623,7 @@
 </a:t>
             </a:r>
             <a:r>
-              <a:rPr b="0" sz="975" i="0" u="none">
+              <a:rPr sz="975" b="0" i="0" u="none">
                 <a:solidFill>
                   <a:srgbClr val="E2E8F0"/>
                 </a:solidFill>
@@ -10480,7 +10632,7 @@
               <a:t>   </a:t>
             </a:r>
             <a:r>
-              <a:rPr b="0" sz="975" i="0" u="none">
+              <a:rPr sz="975" b="0" i="0" u="none">
                 <a:solidFill>
                   <a:srgbClr val="C084FC"/>
                 </a:solidFill>
@@ -10489,7 +10641,7 @@
               <a:t>int</a:t>
             </a:r>
             <a:r>
-              <a:rPr b="0" sz="975" i="0" u="none">
+              <a:rPr sz="975" b="0" i="0" u="none">
                 <a:solidFill>
                   <a:srgbClr val="E2E8F0"/>
                 </a:solidFill>
@@ -10502,7 +10654,7 @@
 </a:t>
             </a:r>
             <a:r>
-              <a:rPr b="0" sz="975" i="0" u="none">
+              <a:rPr sz="975" b="0" i="0" u="none">
                 <a:solidFill>
                   <a:srgbClr val="E2E8F0"/>
                 </a:solidFill>
@@ -10511,7 +10663,7 @@
               <a:t>   </a:t>
             </a:r>
             <a:r>
-              <a:rPr b="0" sz="975" i="0" u="none">
+              <a:rPr sz="975" b="0" i="0" u="none">
                 <a:solidFill>
                   <a:srgbClr val="F472B6"/>
                 </a:solidFill>
@@ -10520,7 +10672,7 @@
               <a:t>if</a:t>
             </a:r>
             <a:r>
-              <a:rPr b="0" sz="975" i="0" u="none">
+              <a:rPr sz="975" b="0" i="0" u="none">
                 <a:solidFill>
                   <a:srgbClr val="E2E8F0"/>
                 </a:solidFill>
@@ -10529,7 +10681,7 @@
               <a:t>(slotId != -</a:t>
             </a:r>
             <a:r>
-              <a:rPr b="0" sz="975" i="0" u="none">
+              <a:rPr sz="975" b="0" i="0" u="none">
                 <a:solidFill>
                   <a:srgbClr val="38BDF8"/>
                 </a:solidFill>
@@ -10538,7 +10690,7 @@
               <a:t>1</a:t>
             </a:r>
             <a:r>
-              <a:rPr b="0" sz="975" i="0" u="none">
+              <a:rPr sz="975" b="0" i="0" u="none">
                 <a:solidFill>
                   <a:srgbClr val="E2E8F0"/>
                 </a:solidFill>
@@ -10547,7 +10699,7 @@
               <a:t>) slots[slotId] = </a:t>
             </a:r>
             <a:r>
-              <a:rPr b="0" sz="975" i="0" u="none">
+              <a:rPr sz="975" b="0" i="0" u="none">
                 <a:solidFill>
                   <a:srgbClr val="38BDF8"/>
                 </a:solidFill>
@@ -10556,7 +10708,7 @@
               <a:t>true</a:t>
             </a:r>
             <a:r>
-              <a:rPr b="0" sz="975" i="0" u="none">
+              <a:rPr sz="975" b="0" i="0" u="none">
                 <a:solidFill>
                   <a:srgbClr val="E2E8F0"/>
                 </a:solidFill>
@@ -10569,7 +10721,7 @@
 </a:t>
             </a:r>
             <a:r>
-              <a:rPr b="0" sz="975" i="0" u="none">
+              <a:rPr sz="975" b="0" i="0" u="none">
                 <a:solidFill>
                   <a:srgbClr val="E2E8F0"/>
                 </a:solidFill>
@@ -10597,14 +10749,14 @@
           <a:noFill/>
         </p:spPr>
         <p:txBody>
-          <a:bodyPr wrap="none" lIns="0" rIns="0" tIns="0" bIns="0" anchor="t">
+          <a:bodyPr wrap="none" lIns="0" tIns="0" rIns="0" bIns="0" anchor="t">
             <a:spAutoFit/>
           </a:bodyPr>
           <a:lstStyle/>
           <a:p>
             <a:pPr algn="l"/>
             <a:r>
-              <a:rPr b="0" sz="900" i="0" u="none">
+              <a:rPr sz="900" b="0" i="0" u="none">
                 <a:solidFill>
                   <a:srgbClr val="0F172A"/>
                 </a:solidFill>
@@ -10632,14 +10784,14 @@
           <a:noFill/>
         </p:spPr>
         <p:txBody>
-          <a:bodyPr wrap="none" lIns="0" rIns="0" tIns="0" bIns="0" anchor="t">
+          <a:bodyPr wrap="none" lIns="0" tIns="0" rIns="0" bIns="0" anchor="t">
             <a:spAutoFit/>
           </a:bodyPr>
           <a:lstStyle/>
           <a:p>
             <a:pPr algn="l"/>
             <a:r>
-              <a:rPr b="0" sz="900" i="0" u="none">
+              <a:rPr sz="900" b="0" i="0" u="none">
                 <a:solidFill>
                   <a:srgbClr val="0F172A"/>
                 </a:solidFill>
@@ -10658,7 +10810,7 @@
         </p:nvSpPr>
         <p:spPr>
           <a:xfrm>
-            <a:off x="990600" y="2965102"/>
+            <a:off x="990600" y="2786508"/>
             <a:ext cx="5905500" cy="171450"/>
           </a:xfrm>
           <a:prstGeom prst="rect">
@@ -10667,7 +10819,7 @@
           <a:noFill/>
         </p:spPr>
         <p:txBody>
-          <a:bodyPr wrap="none" lIns="0" rIns="0" tIns="0" bIns="0" anchor="t">
+          <a:bodyPr wrap="none" lIns="0" tIns="0" rIns="0" bIns="0" anchor="t">
             <a:spAutoFit/>
           </a:bodyPr>
           <a:lstStyle/>
@@ -10678,7 +10830,7 @@
               </a:lnSpc>
             </a:pPr>
             <a:r>
-              <a:rPr b="0" sz="900" i="0" u="none">
+              <a:rPr sz="900" b="0" i="0" u="none" dirty="0">
                 <a:solidFill>
                   <a:srgbClr val="64748B"/>
                 </a:solidFill>
@@ -10697,7 +10849,7 @@
         </p:nvSpPr>
         <p:spPr>
           <a:xfrm>
-            <a:off x="6477000" y="2872233"/>
+            <a:off x="6456045" y="2698403"/>
             <a:ext cx="5715000" cy="171450"/>
           </a:xfrm>
           <a:prstGeom prst="rect">
@@ -10706,7 +10858,7 @@
           <a:noFill/>
         </p:spPr>
         <p:txBody>
-          <a:bodyPr wrap="none" lIns="0" rIns="0" tIns="0" bIns="0" anchor="t">
+          <a:bodyPr wrap="none" lIns="0" tIns="0" rIns="0" bIns="0" anchor="t">
             <a:spAutoFit/>
           </a:bodyPr>
           <a:lstStyle/>
@@ -10717,7 +10869,7 @@
               </a:lnSpc>
             </a:pPr>
             <a:r>
-              <a:rPr b="0" sz="900" i="0" u="none">
+              <a:rPr sz="900" b="0" i="0" u="none" dirty="0">
                 <a:solidFill>
                   <a:srgbClr val="64748B"/>
                 </a:solidFill>
@@ -10737,7 +10889,7 @@
 </file>
 
 <file path=ppt/slides/slide8.xml><?xml version="1.0" encoding="utf-8"?>
-<p:sld xmlns:a="http://schemas.openxmlformats.org/drawingml/2006/main" xmlns:p="http://schemas.openxmlformats.org/presentationml/2006/main" xmlns:r="http://schemas.openxmlformats.org/officeDocument/2006/relationships">
+<p:sld xmlns:a="http://schemas.openxmlformats.org/drawingml/2006/main" xmlns:r="http://schemas.openxmlformats.org/officeDocument/2006/relationships" xmlns:p="http://schemas.openxmlformats.org/presentationml/2006/main">
   <p:cSld>
     <p:bg>
       <p:bgPr>
@@ -10753,7 +10905,14 @@
         <p:cNvGrpSpPr/>
         <p:nvPr/>
       </p:nvGrpSpPr>
-      <p:grpSpPr/>
+      <p:grpSpPr>
+        <a:xfrm>
+          <a:off x="0" y="0"/>
+          <a:ext cx="0" cy="0"/>
+          <a:chOff x="0" y="0"/>
+          <a:chExt cx="0" cy="0"/>
+        </a:xfrm>
+      </p:grpSpPr>
       <p:pic>
         <p:nvPicPr>
           <p:cNvPr id="2" name="Picture 1" descr="image.png"/>
@@ -10817,6 +10976,7 @@
           <a:lstStyle/>
           <a:p>
             <a:pPr algn="ctr"/>
+            <a:endParaRPr/>
           </a:p>
         </p:txBody>
       </p:sp>
@@ -10865,6 +11025,7 @@
           <a:lstStyle/>
           <a:p>
             <a:pPr algn="ctr"/>
+            <a:endParaRPr/>
           </a:p>
         </p:txBody>
       </p:sp>
@@ -10913,6 +11074,7 @@
           <a:lstStyle/>
           <a:p>
             <a:pPr algn="ctr"/>
+            <a:endParaRPr/>
           </a:p>
         </p:txBody>
       </p:sp>
@@ -10961,6 +11123,7 @@
           <a:lstStyle/>
           <a:p>
             <a:pPr algn="ctr"/>
+            <a:endParaRPr/>
           </a:p>
         </p:txBody>
       </p:sp>
@@ -11005,6 +11168,7 @@
           <a:lstStyle/>
           <a:p>
             <a:pPr algn="ctr"/>
+            <a:endParaRPr/>
           </a:p>
         </p:txBody>
       </p:sp>
@@ -11145,14 +11309,14 @@
           <a:noFill/>
         </p:spPr>
         <p:txBody>
-          <a:bodyPr wrap="none" lIns="0" rIns="0" tIns="0" bIns="0" anchor="t">
+          <a:bodyPr wrap="none" lIns="0" tIns="0" rIns="0" bIns="0" anchor="t">
             <a:spAutoFit/>
           </a:bodyPr>
           <a:lstStyle/>
           <a:p>
             <a:pPr algn="l"/>
             <a:r>
-              <a:rPr b="1" sz="2850" i="0" u="none">
+              <a:rPr sz="2850" b="1" i="0" u="none">
                 <a:solidFill>
                   <a:srgbClr val="FFFFFF"/>
                 </a:solidFill>
@@ -11180,14 +11344,14 @@
           <a:noFill/>
         </p:spPr>
         <p:txBody>
-          <a:bodyPr wrap="none" lIns="0" rIns="0" tIns="0" bIns="0" anchor="t">
+          <a:bodyPr wrap="none" lIns="0" tIns="0" rIns="0" bIns="0" anchor="t">
             <a:spAutoFit/>
           </a:bodyPr>
           <a:lstStyle/>
           <a:p>
             <a:pPr algn="l"/>
             <a:r>
-              <a:rPr b="0" sz="1050" i="0" u="none">
+              <a:rPr sz="1050" b="0" i="0" u="none">
                 <a:solidFill>
                   <a:srgbClr val="CBD5E1"/>
                 </a:solidFill>
@@ -11215,14 +11379,14 @@
           <a:noFill/>
         </p:spPr>
         <p:txBody>
-          <a:bodyPr wrap="none" lIns="0" rIns="0" tIns="0" bIns="0" anchor="t">
+          <a:bodyPr wrap="none" lIns="0" tIns="0" rIns="0" bIns="0" anchor="t">
             <a:spAutoFit/>
           </a:bodyPr>
           <a:lstStyle/>
           <a:p>
             <a:pPr algn="l"/>
             <a:r>
-              <a:rPr b="0" sz="975" i="0" u="none">
+              <a:rPr sz="975" b="0" i="0" u="none">
                 <a:solidFill>
                   <a:srgbClr val="94A3B8"/>
                 </a:solidFill>
@@ -11250,14 +11414,14 @@
           <a:noFill/>
         </p:spPr>
         <p:txBody>
-          <a:bodyPr wrap="none" lIns="0" rIns="0" tIns="0" bIns="0" anchor="t">
+          <a:bodyPr wrap="none" lIns="0" tIns="0" rIns="0" bIns="0" anchor="t">
             <a:spAutoFit/>
           </a:bodyPr>
           <a:lstStyle/>
           <a:p>
             <a:pPr algn="l"/>
             <a:r>
-              <a:rPr b="1" sz="975" i="0" u="none">
+              <a:rPr sz="975" b="1" i="0" u="none">
                 <a:solidFill>
                   <a:srgbClr val="818CF8"/>
                 </a:solidFill>
@@ -11285,14 +11449,14 @@
           <a:noFill/>
         </p:spPr>
         <p:txBody>
-          <a:bodyPr wrap="none" lIns="0" rIns="0" tIns="0" bIns="0" anchor="t">
+          <a:bodyPr wrap="none" lIns="0" tIns="0" rIns="0" bIns="0" anchor="t">
             <a:spAutoFit/>
           </a:bodyPr>
           <a:lstStyle/>
           <a:p>
             <a:pPr algn="l"/>
             <a:r>
-              <a:rPr b="1" sz="1350" i="0" u="none">
+              <a:rPr sz="1350" b="1" i="0" u="none">
                 <a:solidFill>
                   <a:srgbClr val="F8FAFC"/>
                 </a:solidFill>
@@ -11320,7 +11484,7 @@
           <a:noFill/>
         </p:spPr>
         <p:txBody>
-          <a:bodyPr wrap="square" lIns="0" rIns="0" tIns="0" bIns="0" anchor="t">
+          <a:bodyPr wrap="square" lIns="0" tIns="0" rIns="0" bIns="0" anchor="t">
             <a:spAutoFit/>
           </a:bodyPr>
           <a:lstStyle/>
@@ -11331,7 +11495,7 @@
               </a:lnSpc>
             </a:pPr>
             <a:r>
-              <a:rPr b="0" sz="1125" i="0" u="none">
+              <a:rPr sz="1125" b="0" i="0" u="none">
                 <a:solidFill>
                   <a:srgbClr val="CBD5E1"/>
                 </a:solidFill>
@@ -11359,14 +11523,14 @@
           <a:noFill/>
         </p:spPr>
         <p:txBody>
-          <a:bodyPr wrap="none" lIns="0" rIns="0" tIns="0" bIns="0" anchor="t">
+          <a:bodyPr wrap="none" lIns="0" tIns="0" rIns="0" bIns="0" anchor="t">
             <a:spAutoFit/>
           </a:bodyPr>
           <a:lstStyle/>
           <a:p>
             <a:pPr algn="l"/>
             <a:r>
-              <a:rPr b="1" sz="1350" i="0" u="none">
+              <a:rPr sz="1350" b="1" i="0" u="none">
                 <a:solidFill>
                   <a:srgbClr val="F8FAFC"/>
                 </a:solidFill>
@@ -11394,7 +11558,7 @@
           <a:noFill/>
         </p:spPr>
         <p:txBody>
-          <a:bodyPr wrap="none" lIns="0" rIns="0" tIns="0" bIns="0" anchor="t">
+          <a:bodyPr wrap="none" lIns="0" tIns="0" rIns="0" bIns="0" anchor="t">
             <a:spAutoFit/>
           </a:bodyPr>
           <a:lstStyle/>
@@ -11405,7 +11569,7 @@
               </a:lnSpc>
             </a:pPr>
             <a:r>
-              <a:rPr b="0" sz="1050" i="0" u="none">
+              <a:rPr sz="1050" b="0" i="0" u="none">
                 <a:solidFill>
                   <a:srgbClr val="818CF8"/>
                 </a:solidFill>
